--- a/runnerpub-proposal/러너펍_제안서_내일사장_가로_202607.pptx
+++ b/runnerpub-proposal/러너펍_제안서_내일사장_가로_202607.pptx
@@ -1945,64 +1945,38 @@
       </p:grpSpPr>
       <p:pic>
         <p:nvPicPr>
-          <p:cNvPr id="2" name="Image 0" descr="/home/user/onewillco-meeting-2026/runnerpub-proposal/assets/card.png">    </p:cNvPr>
+          <p:cNvPr id="2" name="Image 0" descr="/home/user/onewillco-meeting-2026/runnerpub-proposal/assets/logo.png">    </p:cNvPr>
           <p:cNvPicPr>
             <a:picLocks noChangeAspect="1"/>
           </p:cNvPicPr>
           <p:nvPr/>
         </p:nvPicPr>
         <p:blipFill>
-          <a:blip r:embed="rId1">
-            <a:alphaModFix amt="18000"/>
-          </a:blip>
+          <a:blip r:embed="rId1"/>
           <a:stretch>
             <a:fillRect/>
           </a:stretch>
         </p:blipFill>
         <p:spPr>
           <a:xfrm>
-            <a:off x="9646920" y="1051560"/>
-            <a:ext cx="1874520" cy="2688336"/>
+            <a:off x="9960559" y="457200"/>
+            <a:ext cx="1664208" cy="548640"/>
           </a:xfrm>
           <a:prstGeom prst="rect">
             <a:avLst/>
           </a:prstGeom>
         </p:spPr>
       </p:pic>
-      <p:pic>
-        <p:nvPicPr>
-          <p:cNvPr id="3" name="Image 1" descr="/home/user/onewillco-meeting-2026/runnerpub-proposal/assets/logo.png">    </p:cNvPr>
-          <p:cNvPicPr>
-            <a:picLocks noChangeAspect="1"/>
-          </p:cNvPicPr>
-          <p:nvPr/>
-        </p:nvPicPr>
-        <p:blipFill>
-          <a:blip r:embed="rId2"/>
-          <a:stretch>
-            <a:fillRect/>
-          </a:stretch>
-        </p:blipFill>
-        <p:spPr>
-          <a:xfrm>
-            <a:off x="9710928" y="475488"/>
-            <a:ext cx="1737360" cy="566928"/>
-          </a:xfrm>
-          <a:prstGeom prst="rect">
-            <a:avLst/>
-          </a:prstGeom>
-        </p:spPr>
-      </p:pic>
-      <p:sp>
-        <p:nvSpPr>
-          <p:cNvPr id="4" name="Text 0"/>
-          <p:cNvSpPr/>
-          <p:nvPr/>
-        </p:nvSpPr>
-        <p:spPr>
-          <a:xfrm>
-            <a:off x="8732520" y="502920"/>
-            <a:ext cx="822960" cy="182880"/>
+      <p:sp>
+        <p:nvSpPr>
+          <p:cNvPr id="3" name="Text 0"/>
+          <p:cNvSpPr/>
+          <p:nvPr/>
+        </p:nvSpPr>
+        <p:spPr>
+          <a:xfrm>
+            <a:off x="8332927" y="1133856"/>
+            <a:ext cx="3291840" cy="164592"/>
           </a:xfrm>
           <a:prstGeom prst="rect">
             <a:avLst/>
@@ -2018,7 +1992,7 @@
               <a:buNone/>
             </a:pPr>
             <a:r>
-              <a:rPr lang="en-US" sz="750" dirty="0">
+              <a:rPr lang="en-US" sz="720" dirty="0">
                 <a:solidFill>
                   <a:srgbClr val="97A39D"/>
                 </a:solidFill>
@@ -2028,20 +2002,20 @@
               </a:rPr>
               <a:t>수신</a:t>
             </a:r>
-            <a:endParaRPr lang="en-US" sz="750" dirty="0"/>
-          </a:p>
-        </p:txBody>
-      </p:sp>
-      <p:sp>
-        <p:nvSpPr>
-          <p:cNvPr id="5" name="Text 1"/>
-          <p:cNvSpPr/>
-          <p:nvPr/>
-        </p:nvSpPr>
-        <p:spPr>
-          <a:xfrm>
-            <a:off x="7589520" y="685800"/>
-            <a:ext cx="1965960" cy="201168"/>
+            <a:endParaRPr lang="en-US" sz="720" dirty="0"/>
+          </a:p>
+        </p:txBody>
+      </p:sp>
+      <p:sp>
+        <p:nvSpPr>
+          <p:cNvPr id="4" name="Text 1"/>
+          <p:cNvSpPr/>
+          <p:nvPr/>
+        </p:nvSpPr>
+        <p:spPr>
+          <a:xfrm>
+            <a:off x="8332927" y="1298448"/>
+            <a:ext cx="3291840" cy="201168"/>
           </a:xfrm>
           <a:prstGeom prst="rect">
             <a:avLst/>
@@ -2057,7 +2031,7 @@
               <a:buNone/>
             </a:pPr>
             <a:r>
-              <a:rPr lang="en-US" sz="860" b="1" dirty="0">
+              <a:rPr lang="en-US" sz="900" b="1" dirty="0">
                 <a:solidFill>
                   <a:srgbClr val="F3F5F1"/>
                 </a:solidFill>
@@ -2065,15 +2039,54 @@
                 <a:ea typeface="맑은 고딕" pitchFamily="34" charset="-122"/>
                 <a:cs typeface="맑은 고딕" pitchFamily="34" charset="-120"/>
               </a:rPr>
-              <a:t>러너스튜디오(주)</a:t>
-            </a:r>
-            <a:endParaRPr lang="en-US" sz="860" dirty="0"/>
-          </a:p>
-        </p:txBody>
-      </p:sp>
-      <p:sp>
-        <p:nvSpPr>
-          <p:cNvPr id="6" name="Text 2"/>
+              <a:t>러너스튜디오(주) 귀중</a:t>
+            </a:r>
+            <a:endParaRPr lang="en-US" sz="900" dirty="0"/>
+          </a:p>
+        </p:txBody>
+      </p:sp>
+      <p:sp>
+        <p:nvSpPr>
+          <p:cNvPr id="5" name="Text 2"/>
+          <p:cNvSpPr/>
+          <p:nvPr/>
+        </p:nvSpPr>
+        <p:spPr>
+          <a:xfrm>
+            <a:off x="8332927" y="1499616"/>
+            <a:ext cx="3291840" cy="182880"/>
+          </a:xfrm>
+          <a:prstGeom prst="rect">
+            <a:avLst/>
+          </a:prstGeom>
+          <a:noFill/>
+          <a:ln/>
+        </p:spPr>
+        <p:txBody>
+          <a:bodyPr wrap="square" lIns="0" tIns="0" rIns="0" bIns="0" rtlCol="0" anchor="ctr"/>
+          <a:lstStyle/>
+          <a:p>
+            <a:pPr algn="r" indent="0" marL="0">
+              <a:buNone/>
+            </a:pPr>
+            <a:r>
+              <a:rPr lang="en-US" sz="800" dirty="0">
+                <a:solidFill>
+                  <a:srgbClr val="97A39D"/>
+                </a:solidFill>
+                <a:latin typeface="맑은 고딕" pitchFamily="34" charset="0"/>
+                <a:ea typeface="맑은 고딕" pitchFamily="34" charset="-122"/>
+                <a:cs typeface="맑은 고딕" pitchFamily="34" charset="-120"/>
+              </a:rPr>
+              <a:t>대표 박경관</a:t>
+            </a:r>
+            <a:endParaRPr lang="en-US" sz="800" dirty="0"/>
+          </a:p>
+        </p:txBody>
+      </p:sp>
+      <p:sp>
+        <p:nvSpPr>
+          <p:cNvPr id="6" name="Text 3"/>
           <p:cNvSpPr/>
           <p:nvPr/>
         </p:nvSpPr>
@@ -2112,7 +2125,7 @@
       </p:sp>
       <p:sp>
         <p:nvSpPr>
-          <p:cNvPr id="7" name="Text 3"/>
+          <p:cNvPr id="7" name="Text 4"/>
           <p:cNvSpPr/>
           <p:nvPr/>
         </p:nvSpPr>
@@ -2151,14 +2164,14 @@
       </p:sp>
       <p:sp>
         <p:nvSpPr>
-          <p:cNvPr id="8" name="Text 4"/>
+          <p:cNvPr id="8" name="Text 5"/>
           <p:cNvSpPr/>
           <p:nvPr/>
         </p:nvSpPr>
         <p:spPr>
           <a:xfrm>
             <a:off x="566928" y="1874520"/>
-            <a:ext cx="7863840" cy="1188720"/>
+            <a:ext cx="8412480" cy="1737360"/>
           </a:xfrm>
           <a:prstGeom prst="rect">
             <a:avLst/>
@@ -2172,7 +2185,7 @@
           <a:p>
             <a:pPr indent="0" marL="0">
               <a:lnSpc>
-                <a:spcPts val="4600"/>
+                <a:spcPts val="4800"/>
               </a:lnSpc>
               <a:buNone/>
             </a:pPr>
@@ -2192,56 +2205,51 @@
           <a:p>
             <a:pPr indent="0" marL="0">
               <a:lnSpc>
-                <a:spcPts val="4600"/>
+                <a:spcPts val="4800"/>
               </a:lnSpc>
               <a:buNone/>
             </a:pPr>
             <a:r>
               <a:rPr lang="en-US" sz="3300" b="1" spc="-80" kern="0" dirty="0">
                 <a:solidFill>
+                  <a:srgbClr val="9BC2BE"/>
+                </a:solidFill>
+                <a:latin typeface="맑은 고딕" pitchFamily="34" charset="0"/>
+                <a:ea typeface="맑은 고딕" pitchFamily="34" charset="-122"/>
+                <a:cs typeface="맑은 고딕" pitchFamily="34" charset="-120"/>
+              </a:rPr>
+              <a:t>이미 모인 창업 수요</a:t>
+            </a:r>
+            <a:pPr indent="0" marL="0">
+              <a:lnSpc>
+                <a:spcPts val="4800"/>
+              </a:lnSpc>
+              <a:buNone/>
+            </a:pPr>
+            <a:r>
+              <a:rPr lang="en-US" sz="3300" b="1" spc="-80" kern="0" dirty="0">
+                <a:solidFill>
                   <a:srgbClr val="F3F5F1"/>
                 </a:solidFill>
                 <a:latin typeface="맑은 고딕" pitchFamily="34" charset="0"/>
                 <a:ea typeface="맑은 고딕" pitchFamily="34" charset="-122"/>
                 <a:cs typeface="맑은 고딕" pitchFamily="34" charset="-120"/>
               </a:rPr>
-              <a:t>이미 모인 창업 수요 위에서</a:t>
+              <a:t> 위에서</a:t>
             </a:r>
             <a:endParaRPr lang="en-US" sz="3300" dirty="0"/>
           </a:p>
-        </p:txBody>
-      </p:sp>
-      <p:sp>
-        <p:nvSpPr>
-          <p:cNvPr id="9" name="Text 5"/>
-          <p:cNvSpPr/>
-          <p:nvPr/>
-        </p:nvSpPr>
-        <p:spPr>
-          <a:xfrm>
-            <a:off x="566928" y="2999232"/>
-            <a:ext cx="7863840" cy="566928"/>
-          </a:xfrm>
-          <a:prstGeom prst="rect">
-            <a:avLst/>
-          </a:prstGeom>
-          <a:noFill/>
-          <a:ln/>
-        </p:spPr>
-        <p:txBody>
-          <a:bodyPr wrap="square" lIns="0" tIns="0" rIns="0" bIns="0" rtlCol="0" anchor="ctr"/>
-          <a:lstStyle/>
           <a:p>
             <a:pPr indent="0" marL="0">
               <a:lnSpc>
-                <a:spcPts val="4600"/>
+                <a:spcPts val="4800"/>
               </a:lnSpc>
               <a:buNone/>
             </a:pPr>
             <a:r>
               <a:rPr lang="en-US" sz="3300" b="1" spc="-80" kern="0" dirty="0">
                 <a:solidFill>
-                  <a:srgbClr val="9BC2BE"/>
+                  <a:srgbClr val="F3F5F1"/>
                 </a:solidFill>
                 <a:latin typeface="맑은 고딕" pitchFamily="34" charset="0"/>
                 <a:ea typeface="맑은 고딕" pitchFamily="34" charset="-122"/>
@@ -2255,7 +2263,7 @@
       </p:sp>
       <p:sp>
         <p:nvSpPr>
-          <p:cNvPr id="10" name="Text 6"/>
+          <p:cNvPr id="9" name="Text 6"/>
           <p:cNvSpPr/>
           <p:nvPr/>
         </p:nvSpPr>
@@ -2317,7 +2325,7 @@
       </p:sp>
       <p:sp>
         <p:nvSpPr>
-          <p:cNvPr id="11" name="Shape 7"/>
+          <p:cNvPr id="10" name="Shape 7"/>
           <p:cNvSpPr/>
           <p:nvPr/>
         </p:nvSpPr>
@@ -2342,7 +2350,7 @@
       </p:sp>
       <p:sp>
         <p:nvSpPr>
-          <p:cNvPr id="12" name="Text 8"/>
+          <p:cNvPr id="11" name="Text 8"/>
           <p:cNvSpPr/>
           <p:nvPr/>
         </p:nvSpPr>
@@ -2395,7 +2403,7 @@
       </p:sp>
       <p:sp>
         <p:nvSpPr>
-          <p:cNvPr id="13" name="Text 9"/>
+          <p:cNvPr id="12" name="Text 9"/>
           <p:cNvSpPr/>
           <p:nvPr/>
         </p:nvSpPr>
@@ -2434,7 +2442,7 @@
       </p:sp>
       <p:sp>
         <p:nvSpPr>
-          <p:cNvPr id="14" name="Text 10"/>
+          <p:cNvPr id="13" name="Text 10"/>
           <p:cNvSpPr/>
           <p:nvPr/>
         </p:nvSpPr>
@@ -2487,7 +2495,7 @@
       </p:sp>
       <p:sp>
         <p:nvSpPr>
-          <p:cNvPr id="15" name="Text 11"/>
+          <p:cNvPr id="14" name="Text 11"/>
           <p:cNvSpPr/>
           <p:nvPr/>
         </p:nvSpPr>
@@ -2526,7 +2534,7 @@
       </p:sp>
       <p:sp>
         <p:nvSpPr>
-          <p:cNvPr id="16" name="Text 12"/>
+          <p:cNvPr id="15" name="Text 12"/>
           <p:cNvSpPr/>
           <p:nvPr/>
         </p:nvSpPr>
@@ -2579,7 +2587,7 @@
       </p:sp>
       <p:sp>
         <p:nvSpPr>
-          <p:cNvPr id="17" name="Text 13"/>
+          <p:cNvPr id="16" name="Text 13"/>
           <p:cNvSpPr/>
           <p:nvPr/>
         </p:nvSpPr>
@@ -2618,7 +2626,7 @@
       </p:sp>
       <p:sp>
         <p:nvSpPr>
-          <p:cNvPr id="18" name="Text 14"/>
+          <p:cNvPr id="17" name="Text 14"/>
           <p:cNvSpPr/>
           <p:nvPr/>
         </p:nvSpPr>
@@ -2671,7 +2679,7 @@
       </p:sp>
       <p:sp>
         <p:nvSpPr>
-          <p:cNvPr id="19" name="Text 15"/>
+          <p:cNvPr id="18" name="Text 15"/>
           <p:cNvSpPr/>
           <p:nvPr/>
         </p:nvSpPr>
@@ -2710,7 +2718,7 @@
       </p:sp>
       <p:sp>
         <p:nvSpPr>
-          <p:cNvPr id="20" name="Text 16"/>
+          <p:cNvPr id="19" name="Text 16"/>
           <p:cNvSpPr/>
           <p:nvPr/>
         </p:nvSpPr>
@@ -2763,7 +2771,7 @@
       </p:sp>
       <p:sp>
         <p:nvSpPr>
-          <p:cNvPr id="21" name="Text 17"/>
+          <p:cNvPr id="20" name="Text 17"/>
           <p:cNvSpPr/>
           <p:nvPr/>
         </p:nvSpPr>
@@ -2802,7 +2810,7 @@
       </p:sp>
       <p:sp>
         <p:nvSpPr>
-          <p:cNvPr id="22" name="Text 18"/>
+          <p:cNvPr id="21" name="Text 18"/>
           <p:cNvSpPr/>
           <p:nvPr/>
         </p:nvSpPr>
@@ -2855,7 +2863,7 @@
       </p:sp>
       <p:sp>
         <p:nvSpPr>
-          <p:cNvPr id="23" name="Text 19"/>
+          <p:cNvPr id="22" name="Text 19"/>
           <p:cNvSpPr/>
           <p:nvPr/>
         </p:nvSpPr>
@@ -2894,7 +2902,7 @@
       </p:sp>
       <p:sp>
         <p:nvSpPr>
-          <p:cNvPr id="24" name="Shape 20"/>
+          <p:cNvPr id="23" name="Shape 20"/>
           <p:cNvSpPr/>
           <p:nvPr/>
         </p:nvSpPr>
@@ -2919,7 +2927,7 @@
       </p:sp>
       <p:sp>
         <p:nvSpPr>
-          <p:cNvPr id="25" name="Text 21"/>
+          <p:cNvPr id="24" name="Text 21"/>
           <p:cNvSpPr/>
           <p:nvPr/>
         </p:nvSpPr>
@@ -2958,7 +2966,7 @@
       </p:sp>
       <p:sp>
         <p:nvSpPr>
-          <p:cNvPr id="26" name="Text 22"/>
+          <p:cNvPr id="25" name="Text 22"/>
           <p:cNvSpPr/>
           <p:nvPr/>
         </p:nvSpPr>
@@ -2997,7 +3005,7 @@
       </p:sp>
       <p:sp>
         <p:nvSpPr>
-          <p:cNvPr id="27" name="Text 23"/>
+          <p:cNvPr id="26" name="Text 23"/>
           <p:cNvSpPr/>
           <p:nvPr/>
         </p:nvSpPr>
@@ -3036,7 +3044,7 @@
       </p:sp>
       <p:sp>
         <p:nvSpPr>
-          <p:cNvPr id="28" name="Text 24"/>
+          <p:cNvPr id="27" name="Text 24"/>
           <p:cNvSpPr/>
           <p:nvPr/>
         </p:nvSpPr>
@@ -3075,7 +3083,7 @@
       </p:sp>
       <p:sp>
         <p:nvSpPr>
-          <p:cNvPr id="29" name="Text 25"/>
+          <p:cNvPr id="28" name="Text 25"/>
           <p:cNvSpPr/>
           <p:nvPr/>
         </p:nvSpPr>
@@ -3114,7 +3122,7 @@
       </p:sp>
       <p:sp>
         <p:nvSpPr>
-          <p:cNvPr id="30" name="Shape 26"/>
+          <p:cNvPr id="29" name="Shape 26"/>
           <p:cNvSpPr/>
           <p:nvPr/>
         </p:nvSpPr>
@@ -3139,7 +3147,7 @@
       </p:sp>
       <p:sp>
         <p:nvSpPr>
-          <p:cNvPr id="31" name="Text 27"/>
+          <p:cNvPr id="30" name="Text 27"/>
           <p:cNvSpPr/>
           <p:nvPr/>
         </p:nvSpPr>
@@ -3178,7 +3186,7 @@
       </p:sp>
       <p:sp>
         <p:nvSpPr>
-          <p:cNvPr id="32" name="Text 28"/>
+          <p:cNvPr id="31" name="Text 28"/>
           <p:cNvSpPr/>
           <p:nvPr/>
         </p:nvSpPr>
@@ -4731,7 +4739,7 @@
         <p:spPr>
           <a:xfrm>
             <a:off x="1847088" y="4279392"/>
-            <a:ext cx="3474720" cy="292608"/>
+            <a:ext cx="3474720" cy="310896"/>
           </a:xfrm>
           <a:prstGeom prst="rect">
             <a:avLst/>
@@ -4773,7 +4781,7 @@
         <p:spPr>
           <a:xfrm>
             <a:off x="5413248" y="4279392"/>
-            <a:ext cx="2011680" cy="292608"/>
+            <a:ext cx="2011680" cy="310896"/>
           </a:xfrm>
           <a:prstGeom prst="rect">
             <a:avLst/>
@@ -4815,7 +4823,7 @@
         <p:spPr>
           <a:xfrm>
             <a:off x="7516368" y="4279392"/>
-            <a:ext cx="4016959" cy="292608"/>
+            <a:ext cx="4016959" cy="310896"/>
           </a:xfrm>
           <a:prstGeom prst="rect">
             <a:avLst/>
@@ -4856,7 +4864,7 @@
         </p:nvSpPr>
         <p:spPr>
           <a:xfrm>
-            <a:off x="1847088" y="4599432"/>
+            <a:off x="1847088" y="4617720"/>
             <a:ext cx="9777679" cy="7315"/>
           </a:xfrm>
           <a:prstGeom prst="rect">
@@ -4881,8 +4889,8 @@
         </p:nvSpPr>
         <p:spPr>
           <a:xfrm>
-            <a:off x="1847088" y="4645152"/>
-            <a:ext cx="3474720" cy="292608"/>
+            <a:off x="1847088" y="4663440"/>
+            <a:ext cx="3474720" cy="310896"/>
           </a:xfrm>
           <a:prstGeom prst="rect">
             <a:avLst/>
@@ -4923,8 +4931,8 @@
         </p:nvSpPr>
         <p:spPr>
           <a:xfrm>
-            <a:off x="5413248" y="4645152"/>
-            <a:ext cx="2011680" cy="292608"/>
+            <a:off x="5413248" y="4663440"/>
+            <a:ext cx="2011680" cy="310896"/>
           </a:xfrm>
           <a:prstGeom prst="rect">
             <a:avLst/>
@@ -4965,8 +4973,8 @@
         </p:nvSpPr>
         <p:spPr>
           <a:xfrm>
-            <a:off x="7516368" y="4645152"/>
-            <a:ext cx="4016959" cy="292608"/>
+            <a:off x="7516368" y="4663440"/>
+            <a:ext cx="4016959" cy="310896"/>
           </a:xfrm>
           <a:prstGeom prst="rect">
             <a:avLst/>
@@ -5007,7 +5015,7 @@
         </p:nvSpPr>
         <p:spPr>
           <a:xfrm>
-            <a:off x="1847088" y="4965192"/>
+            <a:off x="1847088" y="5001768"/>
             <a:ext cx="9777679" cy="7315"/>
           </a:xfrm>
           <a:prstGeom prst="rect">
@@ -5032,8 +5040,8 @@
         </p:nvSpPr>
         <p:spPr>
           <a:xfrm>
-            <a:off x="1847088" y="5010912"/>
-            <a:ext cx="3474720" cy="292608"/>
+            <a:off x="1847088" y="5047488"/>
+            <a:ext cx="3474720" cy="310896"/>
           </a:xfrm>
           <a:prstGeom prst="rect">
             <a:avLst/>
@@ -5074,8 +5082,8 @@
         </p:nvSpPr>
         <p:spPr>
           <a:xfrm>
-            <a:off x="5413248" y="5010912"/>
-            <a:ext cx="2011680" cy="292608"/>
+            <a:off x="5413248" y="5047488"/>
+            <a:ext cx="2011680" cy="310896"/>
           </a:xfrm>
           <a:prstGeom prst="rect">
             <a:avLst/>
@@ -5116,8 +5124,8 @@
         </p:nvSpPr>
         <p:spPr>
           <a:xfrm>
-            <a:off x="7516368" y="5010912"/>
-            <a:ext cx="4016959" cy="292608"/>
+            <a:off x="7516368" y="5047488"/>
+            <a:ext cx="4016959" cy="310896"/>
           </a:xfrm>
           <a:prstGeom prst="rect">
             <a:avLst/>
@@ -5158,7 +5166,7 @@
         </p:nvSpPr>
         <p:spPr>
           <a:xfrm>
-            <a:off x="1847088" y="5330952"/>
+            <a:off x="1847088" y="5385816"/>
             <a:ext cx="9777679" cy="7315"/>
           </a:xfrm>
           <a:prstGeom prst="rect">
@@ -5183,7 +5191,7 @@
         </p:nvSpPr>
         <p:spPr>
           <a:xfrm>
-            <a:off x="1847088" y="5431536"/>
+            <a:off x="1847088" y="5623560"/>
             <a:ext cx="2194560" cy="201168"/>
           </a:xfrm>
           <a:prstGeom prst="rect">
@@ -5202,7 +5210,7 @@
             <a:r>
               <a:rPr lang="en-US" sz="800" b="1" spc="60" kern="0" dirty="0">
                 <a:solidFill>
-                  <a:srgbClr val="6C7873"/>
+                  <a:srgbClr val="A8791F"/>
                 </a:solidFill>
                 <a:latin typeface="맑은 고딕" pitchFamily="34" charset="0"/>
                 <a:ea typeface="맑은 고딕" pitchFamily="34" charset="-122"/>
@@ -5216,14 +5224,39 @@
       </p:sp>
       <p:sp>
         <p:nvSpPr>
-          <p:cNvPr id="59" name="Text 57"/>
-          <p:cNvSpPr/>
-          <p:nvPr/>
-        </p:nvSpPr>
-        <p:spPr>
-          <a:xfrm>
-            <a:off x="4133088" y="5394960"/>
-            <a:ext cx="7491679" cy="310896"/>
+          <p:cNvPr id="59" name="Shape 57"/>
+          <p:cNvSpPr/>
+          <p:nvPr/>
+        </p:nvSpPr>
+        <p:spPr>
+          <a:xfrm>
+            <a:off x="1847088" y="5952744"/>
+            <a:ext cx="73152" cy="73152"/>
+          </a:xfrm>
+          <a:prstGeom prst="rect">
+            <a:avLst/>
+          </a:prstGeom>
+          <a:solidFill>
+            <a:srgbClr val="A8791F"/>
+          </a:solidFill>
+          <a:ln w="12700">
+            <a:solidFill>
+              <a:srgbClr val="333333"/>
+            </a:solidFill>
+            <a:prstDash val="solid"/>
+          </a:ln>
+        </p:spPr>
+      </p:sp>
+      <p:sp>
+        <p:nvSpPr>
+          <p:cNvPr id="60" name="Text 58"/>
+          <p:cNvSpPr/>
+          <p:nvPr/>
+        </p:nvSpPr>
+        <p:spPr>
+          <a:xfrm>
+            <a:off x="2048256" y="5861304"/>
+            <a:ext cx="2893466" cy="365760"/>
           </a:xfrm>
           <a:prstGeom prst="rect">
             <a:avLst/>
@@ -5237,12 +5270,12 @@
           <a:p>
             <a:pPr indent="0" marL="0">
               <a:lnSpc>
-                <a:spcPts val="1300"/>
+                <a:spcPts val="1250"/>
               </a:lnSpc>
               <a:buNone/>
             </a:pPr>
             <a:r>
-              <a:rPr lang="en-US" sz="880" dirty="0">
+              <a:rPr lang="en-US" sz="860" dirty="0">
                 <a:solidFill>
                   <a:srgbClr val="2E3A35"/>
                 </a:solidFill>
@@ -5250,15 +5283,149 @@
                 <a:ea typeface="맑은 고딕" pitchFamily="34" charset="-122"/>
                 <a:cs typeface="맑은 고딕" pitchFamily="34" charset="-120"/>
               </a:rPr>
-              <a:t>내일사장이 진행할 수 있으며, 본사 지정 스펙과 감리 승인 범위 안에서 수행합니다. 시공 참여 여부는 가맹 조건에 영향을 주지 않고, 추가 수익 분배는 착수 전 별도 합의합니다.</a:t>
-            </a:r>
-            <a:endParaRPr lang="en-US" sz="880" dirty="0"/>
-          </a:p>
-        </p:txBody>
-      </p:sp>
-      <p:sp>
-        <p:nvSpPr>
-          <p:cNvPr id="60" name="Shape 58"/>
+              <a:t>내일사장이 진행할 수 있으며, 본사 지정 스펙과 감리 승인 범위 안에서 수행합니다</a:t>
+            </a:r>
+            <a:endParaRPr lang="en-US" sz="860" dirty="0"/>
+          </a:p>
+        </p:txBody>
+      </p:sp>
+      <p:sp>
+        <p:nvSpPr>
+          <p:cNvPr id="61" name="Shape 59"/>
+          <p:cNvSpPr/>
+          <p:nvPr/>
+        </p:nvSpPr>
+        <p:spPr>
+          <a:xfrm>
+            <a:off x="5106314" y="5952744"/>
+            <a:ext cx="73152" cy="73152"/>
+          </a:xfrm>
+          <a:prstGeom prst="rect">
+            <a:avLst/>
+          </a:prstGeom>
+          <a:solidFill>
+            <a:srgbClr val="A8791F"/>
+          </a:solidFill>
+          <a:ln w="12700">
+            <a:solidFill>
+              <a:srgbClr val="333333"/>
+            </a:solidFill>
+            <a:prstDash val="solid"/>
+          </a:ln>
+        </p:spPr>
+      </p:sp>
+      <p:sp>
+        <p:nvSpPr>
+          <p:cNvPr id="62" name="Text 60"/>
+          <p:cNvSpPr/>
+          <p:nvPr/>
+        </p:nvSpPr>
+        <p:spPr>
+          <a:xfrm>
+            <a:off x="5307482" y="5861304"/>
+            <a:ext cx="2893466" cy="365760"/>
+          </a:xfrm>
+          <a:prstGeom prst="rect">
+            <a:avLst/>
+          </a:prstGeom>
+          <a:noFill/>
+          <a:ln/>
+        </p:spPr>
+        <p:txBody>
+          <a:bodyPr wrap="square" lIns="0" tIns="0" rIns="0" bIns="0" rtlCol="0" anchor="ctr"/>
+          <a:lstStyle/>
+          <a:p>
+            <a:pPr indent="0" marL="0">
+              <a:lnSpc>
+                <a:spcPts val="1250"/>
+              </a:lnSpc>
+              <a:buNone/>
+            </a:pPr>
+            <a:r>
+              <a:rPr lang="en-US" sz="860" dirty="0">
+                <a:solidFill>
+                  <a:srgbClr val="2E3A35"/>
+                </a:solidFill>
+                <a:latin typeface="맑은 고딕" pitchFamily="34" charset="0"/>
+                <a:ea typeface="맑은 고딕" pitchFamily="34" charset="-122"/>
+                <a:cs typeface="맑은 고딕" pitchFamily="34" charset="-120"/>
+              </a:rPr>
+              <a:t>시공 참여 여부는 가맹 조건에 영향을 주지 않습니다</a:t>
+            </a:r>
+            <a:endParaRPr lang="en-US" sz="860" dirty="0"/>
+          </a:p>
+        </p:txBody>
+      </p:sp>
+      <p:sp>
+        <p:nvSpPr>
+          <p:cNvPr id="63" name="Shape 61"/>
+          <p:cNvSpPr/>
+          <p:nvPr/>
+        </p:nvSpPr>
+        <p:spPr>
+          <a:xfrm>
+            <a:off x="8365541" y="5952744"/>
+            <a:ext cx="73152" cy="73152"/>
+          </a:xfrm>
+          <a:prstGeom prst="rect">
+            <a:avLst/>
+          </a:prstGeom>
+          <a:solidFill>
+            <a:srgbClr val="A8791F"/>
+          </a:solidFill>
+          <a:ln w="12700">
+            <a:solidFill>
+              <a:srgbClr val="333333"/>
+            </a:solidFill>
+            <a:prstDash val="solid"/>
+          </a:ln>
+        </p:spPr>
+      </p:sp>
+      <p:sp>
+        <p:nvSpPr>
+          <p:cNvPr id="64" name="Text 62"/>
+          <p:cNvSpPr/>
+          <p:nvPr/>
+        </p:nvSpPr>
+        <p:spPr>
+          <a:xfrm>
+            <a:off x="8566709" y="5861304"/>
+            <a:ext cx="2893466" cy="365760"/>
+          </a:xfrm>
+          <a:prstGeom prst="rect">
+            <a:avLst/>
+          </a:prstGeom>
+          <a:noFill/>
+          <a:ln/>
+        </p:spPr>
+        <p:txBody>
+          <a:bodyPr wrap="square" lIns="0" tIns="0" rIns="0" bIns="0" rtlCol="0" anchor="ctr"/>
+          <a:lstStyle/>
+          <a:p>
+            <a:pPr indent="0" marL="0">
+              <a:lnSpc>
+                <a:spcPts val="1250"/>
+              </a:lnSpc>
+              <a:buNone/>
+            </a:pPr>
+            <a:r>
+              <a:rPr lang="en-US" sz="860" dirty="0">
+                <a:solidFill>
+                  <a:srgbClr val="2E3A35"/>
+                </a:solidFill>
+                <a:latin typeface="맑은 고딕" pitchFamily="34" charset="0"/>
+                <a:ea typeface="맑은 고딕" pitchFamily="34" charset="-122"/>
+                <a:cs typeface="맑은 고딕" pitchFamily="34" charset="-120"/>
+              </a:rPr>
+              <a:t>추가 수익 분배는 착수 전 별도 합의합니다</a:t>
+            </a:r>
+            <a:endParaRPr lang="en-US" sz="860" dirty="0"/>
+          </a:p>
+        </p:txBody>
+      </p:sp>
+      <p:sp>
+        <p:nvSpPr>
+          <p:cNvPr id="65" name="Shape 63"/>
           <p:cNvSpPr/>
           <p:nvPr/>
         </p:nvSpPr>
@@ -5283,7 +5450,7 @@
       </p:sp>
       <p:sp>
         <p:nvSpPr>
-          <p:cNvPr id="61" name="Text 59"/>
+          <p:cNvPr id="66" name="Text 64"/>
           <p:cNvSpPr/>
           <p:nvPr/>
         </p:nvSpPr>
@@ -5322,7 +5489,7 @@
       </p:sp>
       <p:sp>
         <p:nvSpPr>
-          <p:cNvPr id="62" name="Text 60"/>
+          <p:cNvPr id="67" name="Text 65"/>
           <p:cNvSpPr/>
           <p:nvPr/>
         </p:nvSpPr>
@@ -6488,7 +6655,305 @@
       </p:sp>
       <p:sp>
         <p:nvSpPr>
-          <p:cNvPr id="34" name="Text 32"/>
+          <p:cNvPr id="34" name="Shape 32"/>
+          <p:cNvSpPr/>
+          <p:nvPr/>
+        </p:nvSpPr>
+        <p:spPr>
+          <a:xfrm>
+            <a:off x="1847088" y="4315968"/>
+            <a:ext cx="4114800" cy="10973"/>
+          </a:xfrm>
+          <a:prstGeom prst="rect">
+            <a:avLst/>
+          </a:prstGeom>
+          <a:solidFill>
+            <a:srgbClr val="14201C"/>
+          </a:solidFill>
+          <a:ln w="12700">
+            <a:solidFill>
+              <a:srgbClr val="333333"/>
+            </a:solidFill>
+            <a:prstDash val="solid"/>
+          </a:ln>
+        </p:spPr>
+      </p:sp>
+      <p:sp>
+        <p:nvSpPr>
+          <p:cNvPr id="35" name="Text 33"/>
+          <p:cNvSpPr/>
+          <p:nvPr/>
+        </p:nvSpPr>
+        <p:spPr>
+          <a:xfrm>
+            <a:off x="1847088" y="4443984"/>
+            <a:ext cx="2743200" cy="182880"/>
+          </a:xfrm>
+          <a:prstGeom prst="rect">
+            <a:avLst/>
+          </a:prstGeom>
+          <a:noFill/>
+          <a:ln/>
+        </p:spPr>
+        <p:txBody>
+          <a:bodyPr wrap="square" lIns="0" tIns="0" rIns="0" bIns="0" rtlCol="0" anchor="ctr"/>
+          <a:lstStyle/>
+          <a:p>
+            <a:pPr indent="0" marL="0">
+              <a:buNone/>
+            </a:pPr>
+            <a:r>
+              <a:rPr lang="en-US" sz="780" b="1" spc="60" kern="0" dirty="0">
+                <a:solidFill>
+                  <a:srgbClr val="6C7873"/>
+                </a:solidFill>
+                <a:latin typeface="맑은 고딕" pitchFamily="34" charset="0"/>
+                <a:ea typeface="맑은 고딕" pitchFamily="34" charset="-122"/>
+                <a:cs typeface="맑은 고딕" pitchFamily="34" charset="-120"/>
+              </a:rPr>
+              <a:t>성공보수의 성격</a:t>
+            </a:r>
+            <a:endParaRPr lang="en-US" sz="780" dirty="0"/>
+          </a:p>
+        </p:txBody>
+      </p:sp>
+      <p:sp>
+        <p:nvSpPr>
+          <p:cNvPr id="36" name="Text 34"/>
+          <p:cNvSpPr/>
+          <p:nvPr/>
+        </p:nvSpPr>
+        <p:spPr>
+          <a:xfrm>
+            <a:off x="1847088" y="4700016"/>
+            <a:ext cx="1371600" cy="256032"/>
+          </a:xfrm>
+          <a:prstGeom prst="rect">
+            <a:avLst/>
+          </a:prstGeom>
+          <a:noFill/>
+          <a:ln/>
+        </p:spPr>
+        <p:txBody>
+          <a:bodyPr wrap="square" lIns="0" tIns="0" rIns="0" bIns="0" rtlCol="0" anchor="ctr"/>
+          <a:lstStyle/>
+          <a:p>
+            <a:pPr indent="0" marL="0">
+              <a:buNone/>
+            </a:pPr>
+            <a:r>
+              <a:rPr lang="en-US" sz="880" b="1" dirty="0">
+                <a:solidFill>
+                  <a:srgbClr val="0F6B63"/>
+                </a:solidFill>
+                <a:latin typeface="맑은 고딕" pitchFamily="34" charset="0"/>
+                <a:ea typeface="맑은 고딕" pitchFamily="34" charset="-122"/>
+                <a:cs typeface="맑은 고딕" pitchFamily="34" charset="-120"/>
+              </a:rPr>
+              <a:t>1회성</a:t>
+            </a:r>
+            <a:endParaRPr lang="en-US" sz="880" dirty="0"/>
+          </a:p>
+        </p:txBody>
+      </p:sp>
+      <p:sp>
+        <p:nvSpPr>
+          <p:cNvPr id="37" name="Text 35"/>
+          <p:cNvSpPr/>
+          <p:nvPr/>
+        </p:nvSpPr>
+        <p:spPr>
+          <a:xfrm>
+            <a:off x="3310128" y="4700016"/>
+            <a:ext cx="2651760" cy="256032"/>
+          </a:xfrm>
+          <a:prstGeom prst="rect">
+            <a:avLst/>
+          </a:prstGeom>
+          <a:noFill/>
+          <a:ln/>
+        </p:spPr>
+        <p:txBody>
+          <a:bodyPr wrap="square" lIns="0" tIns="0" rIns="0" bIns="0" rtlCol="0" anchor="ctr"/>
+          <a:lstStyle/>
+          <a:p>
+            <a:pPr indent="0" marL="0">
+              <a:buNone/>
+            </a:pPr>
+            <a:r>
+              <a:rPr lang="en-US" sz="860" dirty="0">
+                <a:solidFill>
+                  <a:srgbClr val="2E3A35"/>
+                </a:solidFill>
+                <a:latin typeface="맑은 고딕" pitchFamily="34" charset="0"/>
+                <a:ea typeface="맑은 고딕" pitchFamily="34" charset="-122"/>
+                <a:cs typeface="맑은 고딕" pitchFamily="34" charset="-120"/>
+              </a:rPr>
+              <a:t>계약 1건에 한 번만 발생합니다</a:t>
+            </a:r>
+            <a:endParaRPr lang="en-US" sz="860" dirty="0"/>
+          </a:p>
+        </p:txBody>
+      </p:sp>
+      <p:sp>
+        <p:nvSpPr>
+          <p:cNvPr id="38" name="Text 36"/>
+          <p:cNvSpPr/>
+          <p:nvPr/>
+        </p:nvSpPr>
+        <p:spPr>
+          <a:xfrm>
+            <a:off x="1847088" y="5084064"/>
+            <a:ext cx="1371600" cy="256032"/>
+          </a:xfrm>
+          <a:prstGeom prst="rect">
+            <a:avLst/>
+          </a:prstGeom>
+          <a:noFill/>
+          <a:ln/>
+        </p:spPr>
+        <p:txBody>
+          <a:bodyPr wrap="square" lIns="0" tIns="0" rIns="0" bIns="0" rtlCol="0" anchor="ctr"/>
+          <a:lstStyle/>
+          <a:p>
+            <a:pPr indent="0" marL="0">
+              <a:buNone/>
+            </a:pPr>
+            <a:r>
+              <a:rPr lang="en-US" sz="880" b="1" dirty="0">
+                <a:solidFill>
+                  <a:srgbClr val="0F6B63"/>
+                </a:solidFill>
+                <a:latin typeface="맑은 고딕" pitchFamily="34" charset="0"/>
+                <a:ea typeface="맑은 고딕" pitchFamily="34" charset="-122"/>
+                <a:cs typeface="맑은 고딕" pitchFamily="34" charset="-120"/>
+              </a:rPr>
+              <a:t>가맹비 내 정산</a:t>
+            </a:r>
+            <a:endParaRPr lang="en-US" sz="880" dirty="0"/>
+          </a:p>
+        </p:txBody>
+      </p:sp>
+      <p:sp>
+        <p:nvSpPr>
+          <p:cNvPr id="39" name="Text 37"/>
+          <p:cNvSpPr/>
+          <p:nvPr/>
+        </p:nvSpPr>
+        <p:spPr>
+          <a:xfrm>
+            <a:off x="3310128" y="5084064"/>
+            <a:ext cx="2651760" cy="256032"/>
+          </a:xfrm>
+          <a:prstGeom prst="rect">
+            <a:avLst/>
+          </a:prstGeom>
+          <a:noFill/>
+          <a:ln/>
+        </p:spPr>
+        <p:txBody>
+          <a:bodyPr wrap="square" lIns="0" tIns="0" rIns="0" bIns="0" rtlCol="0" anchor="ctr"/>
+          <a:lstStyle/>
+          <a:p>
+            <a:pPr indent="0" marL="0">
+              <a:buNone/>
+            </a:pPr>
+            <a:r>
+              <a:rPr lang="en-US" sz="860" dirty="0">
+                <a:solidFill>
+                  <a:srgbClr val="2E3A35"/>
+                </a:solidFill>
+                <a:latin typeface="맑은 고딕" pitchFamily="34" charset="0"/>
+                <a:ea typeface="맑은 고딕" pitchFamily="34" charset="-122"/>
+                <a:cs typeface="맑은 고딕" pitchFamily="34" charset="-120"/>
+              </a:rPr>
+              <a:t>추가 예산 편성이 필요하지 않습니다</a:t>
+            </a:r>
+            <a:endParaRPr lang="en-US" sz="860" dirty="0"/>
+          </a:p>
+        </p:txBody>
+      </p:sp>
+      <p:sp>
+        <p:nvSpPr>
+          <p:cNvPr id="40" name="Text 38"/>
+          <p:cNvSpPr/>
+          <p:nvPr/>
+        </p:nvSpPr>
+        <p:spPr>
+          <a:xfrm>
+            <a:off x="1847088" y="5468112"/>
+            <a:ext cx="1371600" cy="256032"/>
+          </a:xfrm>
+          <a:prstGeom prst="rect">
+            <a:avLst/>
+          </a:prstGeom>
+          <a:noFill/>
+          <a:ln/>
+        </p:spPr>
+        <p:txBody>
+          <a:bodyPr wrap="square" lIns="0" tIns="0" rIns="0" bIns="0" rtlCol="0" anchor="ctr"/>
+          <a:lstStyle/>
+          <a:p>
+            <a:pPr indent="0" marL="0">
+              <a:buNone/>
+            </a:pPr>
+            <a:r>
+              <a:rPr lang="en-US" sz="880" b="1" dirty="0">
+                <a:solidFill>
+                  <a:srgbClr val="0F6B63"/>
+                </a:solidFill>
+                <a:latin typeface="맑은 고딕" pitchFamily="34" charset="0"/>
+                <a:ea typeface="맑은 고딕" pitchFamily="34" charset="-122"/>
+                <a:cs typeface="맑은 고딕" pitchFamily="34" charset="-120"/>
+              </a:rPr>
+              <a:t>로열티는 순증</a:t>
+            </a:r>
+            <a:endParaRPr lang="en-US" sz="880" dirty="0"/>
+          </a:p>
+        </p:txBody>
+      </p:sp>
+      <p:sp>
+        <p:nvSpPr>
+          <p:cNvPr id="41" name="Text 39"/>
+          <p:cNvSpPr/>
+          <p:nvPr/>
+        </p:nvSpPr>
+        <p:spPr>
+          <a:xfrm>
+            <a:off x="3310128" y="5468112"/>
+            <a:ext cx="2651760" cy="256032"/>
+          </a:xfrm>
+          <a:prstGeom prst="rect">
+            <a:avLst/>
+          </a:prstGeom>
+          <a:noFill/>
+          <a:ln/>
+        </p:spPr>
+        <p:txBody>
+          <a:bodyPr wrap="square" lIns="0" tIns="0" rIns="0" bIns="0" rtlCol="0" anchor="ctr"/>
+          <a:lstStyle/>
+          <a:p>
+            <a:pPr indent="0" marL="0">
+              <a:buNone/>
+            </a:pPr>
+            <a:r>
+              <a:rPr lang="en-US" sz="860" dirty="0">
+                <a:solidFill>
+                  <a:srgbClr val="2E3A35"/>
+                </a:solidFill>
+                <a:latin typeface="맑은 고딕" pitchFamily="34" charset="0"/>
+                <a:ea typeface="맑은 고딕" pitchFamily="34" charset="-122"/>
+                <a:cs typeface="맑은 고딕" pitchFamily="34" charset="-120"/>
+              </a:rPr>
+              <a:t>월 150만원은 전액 본사 수익으로 남습니다</a:t>
+            </a:r>
+            <a:endParaRPr lang="en-US" sz="860" dirty="0"/>
+          </a:p>
+        </p:txBody>
+      </p:sp>
+      <p:sp>
+        <p:nvSpPr>
+          <p:cNvPr id="42" name="Text 40"/>
           <p:cNvSpPr/>
           <p:nvPr/>
         </p:nvSpPr>
@@ -6527,7 +6992,7 @@
       </p:sp>
       <p:sp>
         <p:nvSpPr>
-          <p:cNvPr id="35" name="Text 33"/>
+          <p:cNvPr id="43" name="Text 41"/>
           <p:cNvSpPr/>
           <p:nvPr/>
         </p:nvSpPr>
@@ -6566,7 +7031,7 @@
       </p:sp>
       <p:sp>
         <p:nvSpPr>
-          <p:cNvPr id="36" name="Shape 34"/>
+          <p:cNvPr id="44" name="Shape 42"/>
           <p:cNvSpPr/>
           <p:nvPr/>
         </p:nvSpPr>
@@ -6591,7 +7056,7 @@
       </p:sp>
       <p:sp>
         <p:nvSpPr>
-          <p:cNvPr id="37" name="Shape 35"/>
+          <p:cNvPr id="45" name="Shape 43"/>
           <p:cNvSpPr/>
           <p:nvPr/>
         </p:nvSpPr>
@@ -6616,7 +7081,7 @@
       </p:sp>
       <p:sp>
         <p:nvSpPr>
-          <p:cNvPr id="38" name="Text 36"/>
+          <p:cNvPr id="46" name="Text 44"/>
           <p:cNvSpPr/>
           <p:nvPr/>
         </p:nvSpPr>
@@ -6669,7 +7134,7 @@
       </p:sp>
       <p:sp>
         <p:nvSpPr>
-          <p:cNvPr id="39" name="Text 37"/>
+          <p:cNvPr id="47" name="Text 45"/>
           <p:cNvSpPr/>
           <p:nvPr/>
         </p:nvSpPr>
@@ -6708,7 +7173,7 @@
       </p:sp>
       <p:sp>
         <p:nvSpPr>
-          <p:cNvPr id="40" name="Shape 38"/>
+          <p:cNvPr id="48" name="Shape 46"/>
           <p:cNvSpPr/>
           <p:nvPr/>
         </p:nvSpPr>
@@ -6733,7 +7198,7 @@
       </p:sp>
       <p:sp>
         <p:nvSpPr>
-          <p:cNvPr id="41" name="Shape 39"/>
+          <p:cNvPr id="49" name="Shape 47"/>
           <p:cNvSpPr/>
           <p:nvPr/>
         </p:nvSpPr>
@@ -6758,7 +7223,7 @@
       </p:sp>
       <p:sp>
         <p:nvSpPr>
-          <p:cNvPr id="42" name="Text 40"/>
+          <p:cNvPr id="50" name="Text 48"/>
           <p:cNvSpPr/>
           <p:nvPr/>
         </p:nvSpPr>
@@ -6811,7 +7276,7 @@
       </p:sp>
       <p:sp>
         <p:nvSpPr>
-          <p:cNvPr id="43" name="Text 41"/>
+          <p:cNvPr id="51" name="Text 49"/>
           <p:cNvSpPr/>
           <p:nvPr/>
         </p:nvSpPr>
@@ -6850,7 +7315,7 @@
       </p:sp>
       <p:sp>
         <p:nvSpPr>
-          <p:cNvPr id="44" name="Shape 42"/>
+          <p:cNvPr id="52" name="Shape 50"/>
           <p:cNvSpPr/>
           <p:nvPr/>
         </p:nvSpPr>
@@ -6875,7 +7340,7 @@
       </p:sp>
       <p:sp>
         <p:nvSpPr>
-          <p:cNvPr id="45" name="Shape 43"/>
+          <p:cNvPr id="53" name="Shape 51"/>
           <p:cNvSpPr/>
           <p:nvPr/>
         </p:nvSpPr>
@@ -6900,7 +7365,7 @@
       </p:sp>
       <p:sp>
         <p:nvSpPr>
-          <p:cNvPr id="46" name="Text 44"/>
+          <p:cNvPr id="54" name="Text 52"/>
           <p:cNvSpPr/>
           <p:nvPr/>
         </p:nvSpPr>
@@ -6953,7 +7418,7 @@
       </p:sp>
       <p:sp>
         <p:nvSpPr>
-          <p:cNvPr id="47" name="Text 45"/>
+          <p:cNvPr id="55" name="Text 53"/>
           <p:cNvSpPr/>
           <p:nvPr/>
         </p:nvSpPr>
@@ -6992,7 +7457,7 @@
       </p:sp>
       <p:sp>
         <p:nvSpPr>
-          <p:cNvPr id="48" name="Shape 46"/>
+          <p:cNvPr id="56" name="Shape 54"/>
           <p:cNvSpPr/>
           <p:nvPr/>
         </p:nvSpPr>
@@ -7017,7 +7482,7 @@
       </p:sp>
       <p:sp>
         <p:nvSpPr>
-          <p:cNvPr id="49" name="Shape 47"/>
+          <p:cNvPr id="57" name="Shape 55"/>
           <p:cNvSpPr/>
           <p:nvPr/>
         </p:nvSpPr>
@@ -7042,7 +7507,7 @@
       </p:sp>
       <p:sp>
         <p:nvSpPr>
-          <p:cNvPr id="50" name="Text 48"/>
+          <p:cNvPr id="58" name="Text 56"/>
           <p:cNvSpPr/>
           <p:nvPr/>
         </p:nvSpPr>
@@ -7095,7 +7560,7 @@
       </p:sp>
       <p:sp>
         <p:nvSpPr>
-          <p:cNvPr id="51" name="Shape 49"/>
+          <p:cNvPr id="59" name="Shape 57"/>
           <p:cNvSpPr/>
           <p:nvPr/>
         </p:nvSpPr>
@@ -7120,7 +7585,7 @@
       </p:sp>
       <p:sp>
         <p:nvSpPr>
-          <p:cNvPr id="52" name="Text 50"/>
+          <p:cNvPr id="60" name="Text 58"/>
           <p:cNvSpPr/>
           <p:nvPr/>
         </p:nvSpPr>
@@ -7159,7 +7624,7 @@
       </p:sp>
       <p:sp>
         <p:nvSpPr>
-          <p:cNvPr id="53" name="Text 51"/>
+          <p:cNvPr id="61" name="Text 59"/>
           <p:cNvSpPr/>
           <p:nvPr/>
         </p:nvSpPr>
@@ -7198,7 +7663,7 @@
       </p:sp>
       <p:sp>
         <p:nvSpPr>
-          <p:cNvPr id="54" name="Text 52"/>
+          <p:cNvPr id="62" name="Text 60"/>
           <p:cNvSpPr/>
           <p:nvPr/>
         </p:nvSpPr>
@@ -7251,7 +7716,7 @@
       </p:sp>
       <p:sp>
         <p:nvSpPr>
-          <p:cNvPr id="55" name="Text 53"/>
+          <p:cNvPr id="63" name="Text 61"/>
           <p:cNvSpPr/>
           <p:nvPr/>
         </p:nvSpPr>
@@ -7290,7 +7755,7 @@
       </p:sp>
       <p:sp>
         <p:nvSpPr>
-          <p:cNvPr id="56" name="Text 54"/>
+          <p:cNvPr id="64" name="Text 62"/>
           <p:cNvSpPr/>
           <p:nvPr/>
         </p:nvSpPr>
@@ -7343,7 +7808,7 @@
       </p:sp>
       <p:sp>
         <p:nvSpPr>
-          <p:cNvPr id="57" name="Text 55"/>
+          <p:cNvPr id="65" name="Text 63"/>
           <p:cNvSpPr/>
           <p:nvPr/>
         </p:nvSpPr>
@@ -7382,7 +7847,7 @@
       </p:sp>
       <p:sp>
         <p:nvSpPr>
-          <p:cNvPr id="58" name="Text 56"/>
+          <p:cNvPr id="66" name="Text 64"/>
           <p:cNvSpPr/>
           <p:nvPr/>
         </p:nvSpPr>
@@ -7435,7 +7900,7 @@
       </p:sp>
       <p:sp>
         <p:nvSpPr>
-          <p:cNvPr id="59" name="Shape 57"/>
+          <p:cNvPr id="67" name="Shape 65"/>
           <p:cNvSpPr/>
           <p:nvPr/>
         </p:nvSpPr>
@@ -7460,7 +7925,7 @@
       </p:sp>
       <p:sp>
         <p:nvSpPr>
-          <p:cNvPr id="60" name="Text 58"/>
+          <p:cNvPr id="68" name="Text 66"/>
           <p:cNvSpPr/>
           <p:nvPr/>
         </p:nvSpPr>
@@ -7499,7 +7964,7 @@
       </p:sp>
       <p:sp>
         <p:nvSpPr>
-          <p:cNvPr id="61" name="Text 59"/>
+          <p:cNvPr id="69" name="Text 67"/>
           <p:cNvSpPr/>
           <p:nvPr/>
         </p:nvSpPr>
@@ -7552,30 +8017,30 @@
       </p:sp>
       <p:sp>
         <p:nvSpPr>
-          <p:cNvPr id="62" name="Text 60"/>
-          <p:cNvSpPr/>
-          <p:nvPr/>
-        </p:nvSpPr>
-        <p:spPr>
-          <a:xfrm>
-            <a:off x="1847088" y="6144768"/>
-            <a:ext cx="9777679" cy="182880"/>
-          </a:xfrm>
-          <a:prstGeom prst="rect">
-            <a:avLst/>
-          </a:prstGeom>
-          <a:noFill/>
-          <a:ln/>
-        </p:spPr>
-        <p:txBody>
-          <a:bodyPr wrap="square" lIns="0" tIns="0" rIns="0" bIns="0" rtlCol="0" anchor="ctr"/>
-          <a:lstStyle/>
-          <a:p>
-            <a:pPr indent="0" marL="0">
-              <a:buNone/>
-            </a:pPr>
-            <a:r>
-              <a:rPr lang="en-US" sz="700" dirty="0">
+          <p:cNvPr id="70" name="Text 68"/>
+          <p:cNvSpPr/>
+          <p:nvPr/>
+        </p:nvSpPr>
+        <p:spPr>
+          <a:xfrm>
+            <a:off x="1847088" y="6208776"/>
+            <a:ext cx="9777679" cy="164592"/>
+          </a:xfrm>
+          <a:prstGeom prst="rect">
+            <a:avLst/>
+          </a:prstGeom>
+          <a:noFill/>
+          <a:ln/>
+        </p:spPr>
+        <p:txBody>
+          <a:bodyPr wrap="square" lIns="0" tIns="0" rIns="0" bIns="0" rtlCol="0" anchor="ctr"/>
+          <a:lstStyle/>
+          <a:p>
+            <a:pPr indent="0" marL="0">
+              <a:buNone/>
+            </a:pPr>
+            <a:r>
+              <a:rPr lang="en-US" sz="680" dirty="0">
                 <a:solidFill>
                   <a:srgbClr val="6C7873"/>
                 </a:solidFill>
@@ -7585,7 +8050,7 @@
               </a:rPr>
               <a:t>※ 러너펍 공개 가맹 안내 기준(가맹비 1,500만원 / 월 로열티 150만원·부가세 별도) 시뮬레이션이며, 실제 조건은 본사 정책에 따릅니다. 폐점·중도해지는 반영하지 않았습니다.</a:t>
             </a:r>
-            <a:endParaRPr lang="en-US" sz="700" dirty="0"/>
+            <a:endParaRPr lang="en-US" sz="680" dirty="0"/>
           </a:p>
         </p:txBody>
       </p:sp>
@@ -13279,24 +13744,24 @@
         </p:nvSpPr>
         <p:spPr>
           <a:xfrm>
-            <a:off x="1847088" y="6144768"/>
-            <a:ext cx="7315200" cy="182880"/>
-          </a:xfrm>
-          <a:prstGeom prst="rect">
-            <a:avLst/>
-          </a:prstGeom>
-          <a:noFill/>
-          <a:ln/>
-        </p:spPr>
-        <p:txBody>
-          <a:bodyPr wrap="square" lIns="0" tIns="0" rIns="0" bIns="0" rtlCol="0" anchor="ctr"/>
-          <a:lstStyle/>
-          <a:p>
-            <a:pPr indent="0" marL="0">
-              <a:buNone/>
-            </a:pPr>
-            <a:r>
-              <a:rPr lang="en-US" sz="700" dirty="0">
+            <a:off x="1847088" y="6208776"/>
+            <a:ext cx="7315200" cy="164592"/>
+          </a:xfrm>
+          <a:prstGeom prst="rect">
+            <a:avLst/>
+          </a:prstGeom>
+          <a:noFill/>
+          <a:ln/>
+        </p:spPr>
+        <p:txBody>
+          <a:bodyPr wrap="square" lIns="0" tIns="0" rIns="0" bIns="0" rtlCol="0" anchor="ctr"/>
+          <a:lstStyle/>
+          <a:p>
+            <a:pPr indent="0" marL="0">
+              <a:buNone/>
+            </a:pPr>
+            <a:r>
+              <a:rPr lang="en-US" sz="680" dirty="0">
                 <a:solidFill>
                   <a:srgbClr val="6C7873"/>
                 </a:solidFill>
@@ -13306,7 +13771,7 @@
               </a:rPr>
               <a:t>※ 지표는 내일사장 플랫폼 전체 누적 기준입니다.</a:t>
             </a:r>
-            <a:endParaRPr lang="en-US" sz="700" dirty="0"/>
+            <a:endParaRPr lang="en-US" sz="680" dirty="0"/>
           </a:p>
         </p:txBody>
       </p:sp>
@@ -14292,8 +14757,8 @@
         </p:nvSpPr>
         <p:spPr>
           <a:xfrm>
-            <a:off x="4960010" y="2084832"/>
-            <a:ext cx="7315" cy="7315"/>
+            <a:off x="4941722" y="2121408"/>
+            <a:ext cx="7315" cy="1060704"/>
           </a:xfrm>
           <a:prstGeom prst="rect">
             <a:avLst/>
@@ -14451,8 +14916,8 @@
         </p:nvSpPr>
         <p:spPr>
           <a:xfrm>
-            <a:off x="8219237" y="2084832"/>
-            <a:ext cx="7315" cy="7315"/>
+            <a:off x="8200949" y="2121408"/>
+            <a:ext cx="7315" cy="1060704"/>
           </a:xfrm>
           <a:prstGeom prst="rect">
             <a:avLst/>
@@ -14744,8 +15209,8 @@
         </p:nvSpPr>
         <p:spPr>
           <a:xfrm>
-            <a:off x="4960010" y="3383280"/>
-            <a:ext cx="7315" cy="7315"/>
+            <a:off x="4941722" y="3419856"/>
+            <a:ext cx="7315" cy="1060704"/>
           </a:xfrm>
           <a:prstGeom prst="rect">
             <a:avLst/>
@@ -14903,8 +15368,8 @@
         </p:nvSpPr>
         <p:spPr>
           <a:xfrm>
-            <a:off x="8219237" y="3383280"/>
-            <a:ext cx="7315" cy="7315"/>
+            <a:off x="8200949" y="3419856"/>
+            <a:ext cx="7315" cy="1060704"/>
           </a:xfrm>
           <a:prstGeom prst="rect">
             <a:avLst/>
@@ -15018,7 +15483,7 @@
         <p:spPr>
           <a:xfrm>
             <a:off x="4133088" y="4937760"/>
-            <a:ext cx="4754880" cy="155448"/>
+            <a:ext cx="5852160" cy="155448"/>
           </a:xfrm>
           <a:prstGeom prst="rect">
             <a:avLst/>
@@ -15043,7 +15508,7 @@
         <p:spPr>
           <a:xfrm>
             <a:off x="4133088" y="4937760"/>
-            <a:ext cx="2852928" cy="155448"/>
+            <a:ext cx="3511296" cy="155448"/>
           </a:xfrm>
           <a:prstGeom prst="rect">
             <a:avLst/>
@@ -15067,24 +15532,24 @@
         </p:nvSpPr>
         <p:spPr>
           <a:xfrm>
-            <a:off x="9070848" y="4846320"/>
-            <a:ext cx="1097280" cy="292608"/>
-          </a:xfrm>
-          <a:prstGeom prst="rect">
-            <a:avLst/>
-          </a:prstGeom>
-          <a:noFill/>
-          <a:ln/>
-        </p:spPr>
-        <p:txBody>
-          <a:bodyPr wrap="square" lIns="0" tIns="0" rIns="0" bIns="0" rtlCol="0" anchor="ctr"/>
-          <a:lstStyle/>
-          <a:p>
-            <a:pPr indent="0" marL="0">
-              <a:buNone/>
-            </a:pPr>
-            <a:r>
-              <a:rPr lang="en-US" sz="1500" b="1" dirty="0">
+            <a:off x="9795967" y="4846320"/>
+            <a:ext cx="1828800" cy="292608"/>
+          </a:xfrm>
+          <a:prstGeom prst="rect">
+            <a:avLst/>
+          </a:prstGeom>
+          <a:noFill/>
+          <a:ln/>
+        </p:spPr>
+        <p:txBody>
+          <a:bodyPr wrap="square" lIns="0" tIns="0" rIns="0" bIns="0" rtlCol="0" anchor="ctr"/>
+          <a:lstStyle/>
+          <a:p>
+            <a:pPr algn="r" indent="0" marL="0">
+              <a:buNone/>
+            </a:pPr>
+            <a:r>
+              <a:rPr lang="en-US" sz="1600" b="1" dirty="0">
                 <a:solidFill>
                   <a:srgbClr val="14201C"/>
                 </a:solidFill>
@@ -15094,11 +15559,11 @@
               </a:rPr>
               <a:t>60</a:t>
             </a:r>
-            <a:pPr indent="0" marL="0">
-              <a:buNone/>
-            </a:pPr>
-            <a:r>
-              <a:rPr lang="en-US" sz="900" b="1" dirty="0">
+            <a:pPr algn="r" indent="0" marL="0">
+              <a:buNone/>
+            </a:pPr>
+            <a:r>
+              <a:rPr lang="en-US" sz="950" b="1" dirty="0">
                 <a:solidFill>
                   <a:srgbClr val="A8791F"/>
                 </a:solidFill>
@@ -15108,7 +15573,7 @@
               </a:rPr>
               <a:t> %</a:t>
             </a:r>
-            <a:endParaRPr lang="en-US" sz="1500" dirty="0"/>
+            <a:endParaRPr lang="en-US" sz="1600" dirty="0"/>
           </a:p>
         </p:txBody>
       </p:sp>
@@ -15276,24 +15741,24 @@
         </p:nvSpPr>
         <p:spPr>
           <a:xfrm>
-            <a:off x="1847088" y="6144768"/>
-            <a:ext cx="9144000" cy="182880"/>
-          </a:xfrm>
-          <a:prstGeom prst="rect">
-            <a:avLst/>
-          </a:prstGeom>
-          <a:noFill/>
-          <a:ln/>
-        </p:spPr>
-        <p:txBody>
-          <a:bodyPr wrap="square" lIns="0" tIns="0" rIns="0" bIns="0" rtlCol="0" anchor="ctr"/>
-          <a:lstStyle/>
-          <a:p>
-            <a:pPr indent="0" marL="0">
-              <a:buNone/>
-            </a:pPr>
-            <a:r>
-              <a:rPr lang="en-US" sz="700" dirty="0">
+            <a:off x="1847088" y="6208776"/>
+            <a:ext cx="9144000" cy="164592"/>
+          </a:xfrm>
+          <a:prstGeom prst="rect">
+            <a:avLst/>
+          </a:prstGeom>
+          <a:noFill/>
+          <a:ln/>
+        </p:spPr>
+        <p:txBody>
+          <a:bodyPr wrap="square" lIns="0" tIns="0" rIns="0" bIns="0" rtlCol="0" anchor="ctr"/>
+          <a:lstStyle/>
+          <a:p>
+            <a:pPr indent="0" marL="0">
+              <a:buNone/>
+            </a:pPr>
+            <a:r>
+              <a:rPr lang="en-US" sz="680" dirty="0">
                 <a:solidFill>
                   <a:srgbClr val="6C7873"/>
                 </a:solidFill>
@@ -15303,7 +15768,7 @@
               </a:rPr>
               <a:t>※ 플랫폼 전체 누적 기준이며, 홀덤 업종 단독 실적이 아닙니다. 업종 경험을 대체하는 장치는 P.12에 정리했습니다.</a:t>
             </a:r>
-            <a:endParaRPr lang="en-US" sz="700" dirty="0"/>
+            <a:endParaRPr lang="en-US" sz="680" dirty="0"/>
           </a:p>
         </p:txBody>
       </p:sp>
@@ -16021,7 +16486,7 @@
         </p:nvSpPr>
         <p:spPr>
           <a:xfrm>
-            <a:off x="1847088" y="2157984"/>
+            <a:off x="1847088" y="2212848"/>
             <a:ext cx="914400" cy="182880"/>
           </a:xfrm>
           <a:prstGeom prst="rect">
@@ -16060,7 +16525,7 @@
         </p:nvSpPr>
         <p:spPr>
           <a:xfrm>
-            <a:off x="1847088" y="2359152"/>
+            <a:off x="1847088" y="2414016"/>
             <a:ext cx="2893466" cy="256032"/>
           </a:xfrm>
           <a:prstGeom prst="rect">
@@ -16099,7 +16564,7 @@
         </p:nvSpPr>
         <p:spPr>
           <a:xfrm>
-            <a:off x="1847088" y="2651760"/>
+            <a:off x="1847088" y="2706624"/>
             <a:ext cx="2893466" cy="475488"/>
           </a:xfrm>
           <a:prstGeom prst="rect">
@@ -16141,7 +16606,7 @@
         </p:nvSpPr>
         <p:spPr>
           <a:xfrm>
-            <a:off x="5106314" y="2157984"/>
+            <a:off x="5106314" y="2212848"/>
             <a:ext cx="914400" cy="182880"/>
           </a:xfrm>
           <a:prstGeom prst="rect">
@@ -16180,7 +16645,7 @@
         </p:nvSpPr>
         <p:spPr>
           <a:xfrm>
-            <a:off x="5106314" y="2359152"/>
+            <a:off x="5106314" y="2414016"/>
             <a:ext cx="2893466" cy="256032"/>
           </a:xfrm>
           <a:prstGeom prst="rect">
@@ -16219,7 +16684,7 @@
         </p:nvSpPr>
         <p:spPr>
           <a:xfrm>
-            <a:off x="5106314" y="2651760"/>
+            <a:off x="5106314" y="2706624"/>
             <a:ext cx="2893466" cy="475488"/>
           </a:xfrm>
           <a:prstGeom prst="rect">
@@ -16261,8 +16726,8 @@
         </p:nvSpPr>
         <p:spPr>
           <a:xfrm>
-            <a:off x="4941722" y="2103120"/>
-            <a:ext cx="7315" cy="7315"/>
+            <a:off x="4923434" y="2176272"/>
+            <a:ext cx="7315" cy="1005840"/>
           </a:xfrm>
           <a:prstGeom prst="rect">
             <a:avLst/>
@@ -16286,7 +16751,7 @@
         </p:nvSpPr>
         <p:spPr>
           <a:xfrm>
-            <a:off x="8365541" y="2157984"/>
+            <a:off x="8365541" y="2212848"/>
             <a:ext cx="914400" cy="182880"/>
           </a:xfrm>
           <a:prstGeom prst="rect">
@@ -16325,7 +16790,7 @@
         </p:nvSpPr>
         <p:spPr>
           <a:xfrm>
-            <a:off x="8365541" y="2359152"/>
+            <a:off x="8365541" y="2414016"/>
             <a:ext cx="2893466" cy="256032"/>
           </a:xfrm>
           <a:prstGeom prst="rect">
@@ -16364,7 +16829,7 @@
         </p:nvSpPr>
         <p:spPr>
           <a:xfrm>
-            <a:off x="8365541" y="2651760"/>
+            <a:off x="8365541" y="2706624"/>
             <a:ext cx="2893466" cy="475488"/>
           </a:xfrm>
           <a:prstGeom prst="rect">
@@ -16406,8 +16871,8 @@
         </p:nvSpPr>
         <p:spPr>
           <a:xfrm>
-            <a:off x="8200949" y="2103120"/>
-            <a:ext cx="7315" cy="7315"/>
+            <a:off x="8182661" y="2176272"/>
+            <a:ext cx="7315" cy="1005840"/>
           </a:xfrm>
           <a:prstGeom prst="rect">
             <a:avLst/>
@@ -16431,7 +16896,7 @@
         </p:nvSpPr>
         <p:spPr>
           <a:xfrm>
-            <a:off x="1847088" y="3346704"/>
+            <a:off x="1847088" y="3529584"/>
             <a:ext cx="914400" cy="182880"/>
           </a:xfrm>
           <a:prstGeom prst="rect">
@@ -16470,7 +16935,7 @@
         </p:nvSpPr>
         <p:spPr>
           <a:xfrm>
-            <a:off x="1847088" y="3547872"/>
+            <a:off x="1847088" y="3730752"/>
             <a:ext cx="2893466" cy="256032"/>
           </a:xfrm>
           <a:prstGeom prst="rect">
@@ -16509,7 +16974,7 @@
         </p:nvSpPr>
         <p:spPr>
           <a:xfrm>
-            <a:off x="1847088" y="3840480"/>
+            <a:off x="1847088" y="4023360"/>
             <a:ext cx="2893466" cy="475488"/>
           </a:xfrm>
           <a:prstGeom prst="rect">
@@ -16551,7 +17016,7 @@
         </p:nvSpPr>
         <p:spPr>
           <a:xfrm>
-            <a:off x="5106314" y="3346704"/>
+            <a:off x="5106314" y="3529584"/>
             <a:ext cx="914400" cy="182880"/>
           </a:xfrm>
           <a:prstGeom prst="rect">
@@ -16590,7 +17055,7 @@
         </p:nvSpPr>
         <p:spPr>
           <a:xfrm>
-            <a:off x="5106314" y="3547872"/>
+            <a:off x="5106314" y="3730752"/>
             <a:ext cx="2893466" cy="256032"/>
           </a:xfrm>
           <a:prstGeom prst="rect">
@@ -16629,7 +17094,7 @@
         </p:nvSpPr>
         <p:spPr>
           <a:xfrm>
-            <a:off x="5106314" y="3840480"/>
+            <a:off x="5106314" y="4023360"/>
             <a:ext cx="2893466" cy="475488"/>
           </a:xfrm>
           <a:prstGeom prst="rect">
@@ -16671,8 +17136,8 @@
         </p:nvSpPr>
         <p:spPr>
           <a:xfrm>
-            <a:off x="4941722" y="3291840"/>
-            <a:ext cx="7315" cy="7315"/>
+            <a:off x="4923434" y="3493008"/>
+            <a:ext cx="7315" cy="1005840"/>
           </a:xfrm>
           <a:prstGeom prst="rect">
             <a:avLst/>
@@ -16696,7 +17161,7 @@
         </p:nvSpPr>
         <p:spPr>
           <a:xfrm>
-            <a:off x="8365541" y="3346704"/>
+            <a:off x="8365541" y="3529584"/>
             <a:ext cx="914400" cy="182880"/>
           </a:xfrm>
           <a:prstGeom prst="rect">
@@ -16735,7 +17200,7 @@
         </p:nvSpPr>
         <p:spPr>
           <a:xfrm>
-            <a:off x="8365541" y="3547872"/>
+            <a:off x="8365541" y="3730752"/>
             <a:ext cx="2893466" cy="256032"/>
           </a:xfrm>
           <a:prstGeom prst="rect">
@@ -16774,7 +17239,7 @@
         </p:nvSpPr>
         <p:spPr>
           <a:xfrm>
-            <a:off x="8365541" y="3840480"/>
+            <a:off x="8365541" y="4023360"/>
             <a:ext cx="2893466" cy="475488"/>
           </a:xfrm>
           <a:prstGeom prst="rect">
@@ -16816,8 +17281,8 @@
         </p:nvSpPr>
         <p:spPr>
           <a:xfrm>
-            <a:off x="8200949" y="3291840"/>
-            <a:ext cx="7315" cy="7315"/>
+            <a:off x="8182661" y="3493008"/>
+            <a:ext cx="7315" cy="1005840"/>
           </a:xfrm>
           <a:prstGeom prst="rect">
             <a:avLst/>
@@ -16841,7 +17306,7 @@
         </p:nvSpPr>
         <p:spPr>
           <a:xfrm>
-            <a:off x="1847088" y="3310128"/>
+            <a:off x="1847088" y="3474720"/>
             <a:ext cx="9777679" cy="7315"/>
           </a:xfrm>
           <a:prstGeom prst="rect">
@@ -16866,7 +17331,7 @@
         </p:nvSpPr>
         <p:spPr>
           <a:xfrm>
-            <a:off x="1847088" y="4498848"/>
+            <a:off x="1847088" y="4791456"/>
             <a:ext cx="9777679" cy="7315"/>
           </a:xfrm>
           <a:prstGeom prst="rect">
@@ -16891,8 +17356,8 @@
         </p:nvSpPr>
         <p:spPr>
           <a:xfrm>
-            <a:off x="1847088" y="4663440"/>
-            <a:ext cx="9777679" cy="457200"/>
+            <a:off x="1847088" y="4992624"/>
+            <a:ext cx="9777679" cy="548640"/>
           </a:xfrm>
           <a:prstGeom prst="rect">
             <a:avLst/>
@@ -16906,12 +17371,12 @@
           <a:p>
             <a:pPr indent="0" marL="0">
               <a:lnSpc>
-                <a:spcPts val="1500"/>
+                <a:spcPts val="1600"/>
               </a:lnSpc>
               <a:buNone/>
             </a:pPr>
             <a:r>
-              <a:rPr lang="en-US" sz="960" dirty="0">
+              <a:rPr lang="en-US" sz="1000" dirty="0">
                 <a:solidFill>
                   <a:srgbClr val="2E3A35"/>
                 </a:solidFill>
@@ -16921,7 +17386,7 @@
               </a:rPr>
               <a:t>이 여섯 가지는 러너펍 가맹 상담에도 그대로 투입됩니다. 창업자가 결정을 미루는 이유는 대부분 정보 부족이고, 저희는 근거를 문서로 제시해 그 지연을 끊습니다.</a:t>
             </a:r>
-            <a:endParaRPr lang="en-US" sz="960" dirty="0"/>
+            <a:endParaRPr lang="en-US" sz="1000" dirty="0"/>
           </a:p>
         </p:txBody>
       </p:sp>
@@ -19811,8 +20276,8 @@
         </p:nvSpPr>
         <p:spPr>
           <a:xfrm>
-            <a:off x="1847088" y="2395728"/>
-            <a:ext cx="2954426" cy="438912"/>
+            <a:off x="1847088" y="2377440"/>
+            <a:ext cx="2954426" cy="402336"/>
           </a:xfrm>
           <a:prstGeom prst="rect">
             <a:avLst/>
@@ -19853,8 +20318,8 @@
         </p:nvSpPr>
         <p:spPr>
           <a:xfrm>
-            <a:off x="1847088" y="2907792"/>
-            <a:ext cx="2954426" cy="786384"/>
+            <a:off x="1847088" y="2834640"/>
+            <a:ext cx="2954426" cy="731520"/>
           </a:xfrm>
           <a:prstGeom prst="rect">
             <a:avLst/>
@@ -19868,12 +20333,12 @@
           <a:p>
             <a:pPr indent="0" marL="0">
               <a:lnSpc>
-                <a:spcPts val="1300"/>
+                <a:spcPts val="1350"/>
               </a:lnSpc>
               <a:buNone/>
             </a:pPr>
             <a:r>
-              <a:rPr lang="en-US" sz="860" dirty="0">
+              <a:rPr lang="en-US" sz="880" dirty="0">
                 <a:solidFill>
                   <a:srgbClr val="6C7873"/>
                 </a:solidFill>
@@ -19883,7 +20348,7 @@
               </a:rPr>
               <a:t>앱 10만 다운로드 · 월 5만 명 채널에서 창업 수요를 확보합니다</a:t>
             </a:r>
-            <a:endParaRPr lang="en-US" sz="860" dirty="0"/>
+            <a:endParaRPr lang="en-US" sz="880" dirty="0"/>
           </a:p>
         </p:txBody>
       </p:sp>
@@ -19998,8 +20463,8 @@
         </p:nvSpPr>
         <p:spPr>
           <a:xfrm>
-            <a:off x="5258714" y="2395728"/>
-            <a:ext cx="2954426" cy="438912"/>
+            <a:off x="5258714" y="2377440"/>
+            <a:ext cx="2954426" cy="402336"/>
           </a:xfrm>
           <a:prstGeom prst="rect">
             <a:avLst/>
@@ -20040,8 +20505,8 @@
         </p:nvSpPr>
         <p:spPr>
           <a:xfrm>
-            <a:off x="5258714" y="2907792"/>
-            <a:ext cx="2954426" cy="786384"/>
+            <a:off x="5258714" y="2834640"/>
+            <a:ext cx="2954426" cy="731520"/>
           </a:xfrm>
           <a:prstGeom prst="rect">
             <a:avLst/>
@@ -20055,12 +20520,12 @@
           <a:p>
             <a:pPr indent="0" marL="0">
               <a:lnSpc>
-                <a:spcPts val="1300"/>
+                <a:spcPts val="1350"/>
               </a:lnSpc>
               <a:buNone/>
             </a:pPr>
             <a:r>
-              <a:rPr lang="en-US" sz="860" dirty="0">
+              <a:rPr lang="en-US" sz="880" dirty="0">
                 <a:solidFill>
                   <a:srgbClr val="6C7873"/>
                 </a:solidFill>
@@ -20070,7 +20535,7 @@
               </a:rPr>
               <a:t>B2B 제휴 네트워크에서 조건에 맞는 브랜드를 매칭합니다</a:t>
             </a:r>
-            <a:endParaRPr lang="en-US" sz="860" dirty="0"/>
+            <a:endParaRPr lang="en-US" sz="880" dirty="0"/>
           </a:p>
         </p:txBody>
       </p:sp>
@@ -20185,8 +20650,8 @@
         </p:nvSpPr>
         <p:spPr>
           <a:xfrm>
-            <a:off x="8670341" y="2395728"/>
-            <a:ext cx="2954426" cy="438912"/>
+            <a:off x="8670341" y="2377440"/>
+            <a:ext cx="2954426" cy="402336"/>
           </a:xfrm>
           <a:prstGeom prst="rect">
             <a:avLst/>
@@ -20227,8 +20692,8 @@
         </p:nvSpPr>
         <p:spPr>
           <a:xfrm>
-            <a:off x="8670341" y="2907792"/>
-            <a:ext cx="2954426" cy="786384"/>
+            <a:off x="8670341" y="2834640"/>
+            <a:ext cx="2954426" cy="731520"/>
           </a:xfrm>
           <a:prstGeom prst="rect">
             <a:avLst/>
@@ -20242,12 +20707,12 @@
           <a:p>
             <a:pPr indent="0" marL="0">
               <a:lnSpc>
-                <a:spcPts val="1300"/>
+                <a:spcPts val="1350"/>
               </a:lnSpc>
               <a:buNone/>
             </a:pPr>
             <a:r>
-              <a:rPr lang="en-US" sz="860" dirty="0">
+              <a:rPr lang="en-US" sz="880" dirty="0">
                 <a:solidFill>
                   <a:srgbClr val="6C7873"/>
                 </a:solidFill>
@@ -20257,7 +20722,7 @@
               </a:rPr>
               <a:t>리맥스코리아 등 중개망과 매물 10,000건 DB로 입점지를 확보합니다</a:t>
             </a:r>
-            <a:endParaRPr lang="en-US" sz="860" dirty="0"/>
+            <a:endParaRPr lang="en-US" sz="880" dirty="0"/>
           </a:p>
         </p:txBody>
       </p:sp>
@@ -20333,7 +20798,7 @@
         </p:nvSpPr>
         <p:spPr>
           <a:xfrm>
-            <a:off x="1847088" y="4279392"/>
+            <a:off x="1847088" y="4224528"/>
             <a:ext cx="82296" cy="82296"/>
           </a:xfrm>
           <a:prstGeom prst="rect">
@@ -20358,7 +20823,7 @@
         </p:nvSpPr>
         <p:spPr>
           <a:xfrm>
-            <a:off x="2084832" y="4187952"/>
+            <a:off x="2084832" y="4133088"/>
             <a:ext cx="3108960" cy="274320"/>
           </a:xfrm>
           <a:prstGeom prst="rect">
@@ -20397,20 +20862,23 @@
         </p:nvSpPr>
         <p:spPr>
           <a:xfrm>
-            <a:off x="5321808" y="4187952"/>
-            <a:ext cx="6302959" cy="274320"/>
-          </a:xfrm>
-          <a:prstGeom prst="rect">
-            <a:avLst/>
-          </a:prstGeom>
-          <a:noFill/>
-          <a:ln/>
-        </p:spPr>
-        <p:txBody>
-          <a:bodyPr wrap="square" lIns="0" tIns="0" rIns="0" bIns="0" rtlCol="0" anchor="ctr"/>
-          <a:lstStyle/>
-          <a:p>
-            <a:pPr indent="0" marL="0">
+            <a:off x="5321808" y="4133088"/>
+            <a:ext cx="6302959" cy="384048"/>
+          </a:xfrm>
+          <a:prstGeom prst="rect">
+            <a:avLst/>
+          </a:prstGeom>
+          <a:noFill/>
+          <a:ln/>
+        </p:spPr>
+        <p:txBody>
+          <a:bodyPr wrap="square" lIns="0" tIns="0" rIns="0" bIns="0" rtlCol="0" anchor="ctr"/>
+          <a:lstStyle/>
+          <a:p>
+            <a:pPr indent="0" marL="0">
+              <a:lnSpc>
+                <a:spcPts val="1350"/>
+              </a:lnSpc>
               <a:buNone/>
             </a:pPr>
             <a:r>
@@ -20422,7 +20890,7 @@
                 <a:ea typeface="맑은 고딕" pitchFamily="34" charset="-122"/>
                 <a:cs typeface="맑은 고딕" pitchFamily="34" charset="-120"/>
               </a:rPr>
-              <a:t>상담 중인 창업자에게 러너펍을 후보 브랜드로 제시합니다</a:t>
+              <a:t>상담 중인 창업자에게 러너펍을 후보 브랜드로 제시합니다. 별도 광고 없이 기존 상담 흐름에 편입됩니다</a:t>
             </a:r>
             <a:endParaRPr lang="en-US" sz="900" dirty="0"/>
           </a:p>
@@ -20501,19 +20969,22 @@
         <p:spPr>
           <a:xfrm>
             <a:off x="5321808" y="4663440"/>
-            <a:ext cx="6302959" cy="274320"/>
-          </a:xfrm>
-          <a:prstGeom prst="rect">
-            <a:avLst/>
-          </a:prstGeom>
-          <a:noFill/>
-          <a:ln/>
-        </p:spPr>
-        <p:txBody>
-          <a:bodyPr wrap="square" lIns="0" tIns="0" rIns="0" bIns="0" rtlCol="0" anchor="ctr"/>
-          <a:lstStyle/>
-          <a:p>
-            <a:pPr indent="0" marL="0">
+            <a:ext cx="6302959" cy="384048"/>
+          </a:xfrm>
+          <a:prstGeom prst="rect">
+            <a:avLst/>
+          </a:prstGeom>
+          <a:noFill/>
+          <a:ln/>
+        </p:spPr>
+        <p:txBody>
+          <a:bodyPr wrap="square" lIns="0" tIns="0" rIns="0" bIns="0" rtlCol="0" anchor="ctr"/>
+          <a:lstStyle/>
+          <a:p>
+            <a:pPr indent="0" marL="0">
+              <a:lnSpc>
+                <a:spcPts val="1350"/>
+              </a:lnSpc>
               <a:buNone/>
             </a:pPr>
             <a:r>
@@ -20525,7 +20996,7 @@
                 <a:ea typeface="맑은 고딕" pitchFamily="34" charset="-122"/>
                 <a:cs typeface="맑은 고딕" pitchFamily="34" charset="-120"/>
               </a:rPr>
-              <a:t>홀덤펍 조건에 맞는 상가를 제휴 중개망에서 물색합니다</a:t>
+              <a:t>홀덤펍 조건에 맞는 상가를 제휴 중개망에서 물색합니다. 입지가 확보된 상태로 창업자에게 제안합니다</a:t>
             </a:r>
             <a:endParaRPr lang="en-US" sz="900" dirty="0"/>
           </a:p>
@@ -20539,7 +21010,7 @@
         </p:nvSpPr>
         <p:spPr>
           <a:xfrm>
-            <a:off x="1847088" y="5230368"/>
+            <a:off x="1847088" y="5285232"/>
             <a:ext cx="82296" cy="82296"/>
           </a:xfrm>
           <a:prstGeom prst="rect">
@@ -20564,7 +21035,7 @@
         </p:nvSpPr>
         <p:spPr>
           <a:xfrm>
-            <a:off x="2084832" y="5138928"/>
+            <a:off x="2084832" y="5193792"/>
             <a:ext cx="3108960" cy="274320"/>
           </a:xfrm>
           <a:prstGeom prst="rect">
@@ -20603,20 +21074,23 @@
         </p:nvSpPr>
         <p:spPr>
           <a:xfrm>
-            <a:off x="5321808" y="5138928"/>
-            <a:ext cx="6302959" cy="274320"/>
-          </a:xfrm>
-          <a:prstGeom prst="rect">
-            <a:avLst/>
-          </a:prstGeom>
-          <a:noFill/>
-          <a:ln/>
-        </p:spPr>
-        <p:txBody>
-          <a:bodyPr wrap="square" lIns="0" tIns="0" rIns="0" bIns="0" rtlCol="0" anchor="ctr"/>
-          <a:lstStyle/>
-          <a:p>
-            <a:pPr indent="0" marL="0">
+            <a:off x="5321808" y="5193792"/>
+            <a:ext cx="6302959" cy="384048"/>
+          </a:xfrm>
+          <a:prstGeom prst="rect">
+            <a:avLst/>
+          </a:prstGeom>
+          <a:noFill/>
+          <a:ln/>
+        </p:spPr>
+        <p:txBody>
+          <a:bodyPr wrap="square" lIns="0" tIns="0" rIns="0" bIns="0" rtlCol="0" anchor="ctr"/>
+          <a:lstStyle/>
+          <a:p>
+            <a:pPr indent="0" marL="0">
+              <a:lnSpc>
+                <a:spcPts val="1350"/>
+              </a:lnSpc>
               <a:buNone/>
             </a:pPr>
             <a:r>
@@ -20628,7 +21102,7 @@
                 <a:ea typeface="맑은 고딕" pitchFamily="34" charset="-122"/>
                 <a:cs typeface="맑은 고딕" pitchFamily="34" charset="-120"/>
               </a:rPr>
-              <a:t>매물·점주 데이터베이스에서 리브랜딩 대상을 발굴합니다</a:t>
+              <a:t>매물·점주 데이터베이스에서 리브랜딩 대상을 발굴합니다. 이미 운영 중인 점주라 전환 결정이 빠릅니다</a:t>
             </a:r>
             <a:endParaRPr lang="en-US" sz="900" dirty="0"/>
           </a:p>
@@ -21504,7 +21978,7 @@
         </p:nvSpPr>
         <p:spPr>
           <a:xfrm>
-            <a:off x="1847088" y="2395728"/>
+            <a:off x="1847088" y="2432304"/>
             <a:ext cx="5943600" cy="310896"/>
           </a:xfrm>
           <a:prstGeom prst="rect">
@@ -21543,7 +22017,7 @@
         </p:nvSpPr>
         <p:spPr>
           <a:xfrm>
-            <a:off x="1847088" y="2743200"/>
+            <a:off x="1847088" y="2779776"/>
             <a:ext cx="5989320" cy="7315"/>
           </a:xfrm>
           <a:prstGeom prst="rect">
@@ -21568,7 +22042,7 @@
         </p:nvSpPr>
         <p:spPr>
           <a:xfrm>
-            <a:off x="1847088" y="2798064"/>
+            <a:off x="1847088" y="2889504"/>
             <a:ext cx="5943600" cy="310896"/>
           </a:xfrm>
           <a:prstGeom prst="rect">
@@ -21607,7 +22081,7 @@
         </p:nvSpPr>
         <p:spPr>
           <a:xfrm>
-            <a:off x="1847088" y="3145536"/>
+            <a:off x="1847088" y="3236976"/>
             <a:ext cx="5989320" cy="7315"/>
           </a:xfrm>
           <a:prstGeom prst="rect">
@@ -21632,7 +22106,7 @@
         </p:nvSpPr>
         <p:spPr>
           <a:xfrm>
-            <a:off x="1847088" y="3200400"/>
+            <a:off x="1847088" y="3346704"/>
             <a:ext cx="5943600" cy="310896"/>
           </a:xfrm>
           <a:prstGeom prst="rect">
@@ -21671,7 +22145,7 @@
         </p:nvSpPr>
         <p:spPr>
           <a:xfrm>
-            <a:off x="1847088" y="3547872"/>
+            <a:off x="1847088" y="3694176"/>
             <a:ext cx="5989320" cy="7315"/>
           </a:xfrm>
           <a:prstGeom prst="rect">
@@ -21696,7 +22170,7 @@
         </p:nvSpPr>
         <p:spPr>
           <a:xfrm>
-            <a:off x="1847088" y="3602736"/>
+            <a:off x="1847088" y="3803904"/>
             <a:ext cx="5943600" cy="310896"/>
           </a:xfrm>
           <a:prstGeom prst="rect">
@@ -21735,7 +22209,7 @@
         </p:nvSpPr>
         <p:spPr>
           <a:xfrm>
-            <a:off x="1847088" y="3950208"/>
+            <a:off x="1847088" y="4151376"/>
             <a:ext cx="5989320" cy="7315"/>
           </a:xfrm>
           <a:prstGeom prst="rect">
@@ -21760,7 +22234,7 @@
         </p:nvSpPr>
         <p:spPr>
           <a:xfrm>
-            <a:off x="1847088" y="4005072"/>
+            <a:off x="1847088" y="4261104"/>
             <a:ext cx="5943600" cy="310896"/>
           </a:xfrm>
           <a:prstGeom prst="rect">
@@ -21799,7 +22273,7 @@
         </p:nvSpPr>
         <p:spPr>
           <a:xfrm>
-            <a:off x="1847088" y="4352544"/>
+            <a:off x="1847088" y="4608576"/>
             <a:ext cx="5989320" cy="7315"/>
           </a:xfrm>
           <a:prstGeom prst="rect">
@@ -22016,8 +22490,8 @@
         </p:blipFill>
         <p:spPr>
           <a:xfrm>
-            <a:off x="8567928" y="3968496"/>
-            <a:ext cx="1783080" cy="1828800"/>
+            <a:off x="8476488" y="4041648"/>
+            <a:ext cx="1481328" cy="1517904"/>
           </a:xfrm>
           <a:prstGeom prst="rect">
             <a:avLst/>
@@ -22032,24 +22506,27 @@
         </p:nvSpPr>
         <p:spPr>
           <a:xfrm>
-            <a:off x="10488168" y="4754880"/>
-            <a:ext cx="1463040" cy="182880"/>
-          </a:xfrm>
-          <a:prstGeom prst="rect">
-            <a:avLst/>
-          </a:prstGeom>
-          <a:noFill/>
-          <a:ln/>
-        </p:spPr>
-        <p:txBody>
-          <a:bodyPr wrap="square" lIns="0" tIns="0" rIns="0" bIns="0" rtlCol="0" anchor="ctr"/>
-          <a:lstStyle/>
-          <a:p>
-            <a:pPr indent="0" marL="0">
-              <a:buNone/>
-            </a:pPr>
-            <a:r>
-              <a:rPr lang="en-US" sz="740" dirty="0">
+            <a:off x="10076688" y="4206240"/>
+            <a:ext cx="1554480" cy="310896"/>
+          </a:xfrm>
+          <a:prstGeom prst="rect">
+            <a:avLst/>
+          </a:prstGeom>
+          <a:noFill/>
+          <a:ln/>
+        </p:spPr>
+        <p:txBody>
+          <a:bodyPr wrap="square" lIns="0" tIns="0" rIns="0" bIns="0" rtlCol="0" anchor="ctr"/>
+          <a:lstStyle/>
+          <a:p>
+            <a:pPr indent="0" marL="0">
+              <a:lnSpc>
+                <a:spcPts val="1100"/>
+              </a:lnSpc>
+              <a:buNone/>
+            </a:pPr>
+            <a:r>
+              <a:rPr lang="en-US" sz="760" dirty="0">
                 <a:solidFill>
                   <a:srgbClr val="6C7873"/>
                 </a:solidFill>
@@ -22057,101 +22534,101 @@
                 <a:ea typeface="맑은 고딕" pitchFamily="34" charset="-122"/>
                 <a:cs typeface="맑은 고딕" pitchFamily="34" charset="-120"/>
               </a:rPr>
+              <a:t>리뉴얼 후 플랫폼 서비스 이용자</a:t>
+            </a:r>
+            <a:endParaRPr lang="en-US" sz="760" dirty="0"/>
+          </a:p>
+        </p:txBody>
+      </p:sp>
+      <p:sp>
+        <p:nvSpPr>
+          <p:cNvPr id="42" name="Text 39"/>
+          <p:cNvSpPr/>
+          <p:nvPr/>
+        </p:nvSpPr>
+        <p:spPr>
+          <a:xfrm>
+            <a:off x="10076688" y="4535424"/>
+            <a:ext cx="1554480" cy="365760"/>
+          </a:xfrm>
+          <a:prstGeom prst="rect">
+            <a:avLst/>
+          </a:prstGeom>
+          <a:noFill/>
+          <a:ln/>
+        </p:spPr>
+        <p:txBody>
+          <a:bodyPr wrap="square" lIns="0" tIns="0" rIns="0" bIns="0" rtlCol="0" anchor="ctr"/>
+          <a:lstStyle/>
+          <a:p>
+            <a:pPr indent="0" marL="0">
+              <a:buNone/>
+            </a:pPr>
+            <a:r>
+              <a:rPr lang="en-US" sz="2000" b="1" dirty="0">
+                <a:solidFill>
+                  <a:srgbClr val="14201C"/>
+                </a:solidFill>
+                <a:latin typeface="맑은 고딕" pitchFamily="34" charset="0"/>
+                <a:ea typeface="맑은 고딕" pitchFamily="34" charset="-122"/>
+                <a:cs typeface="맑은 고딕" pitchFamily="34" charset="-120"/>
+              </a:rPr>
+              <a:t>1.5</a:t>
+            </a:r>
+            <a:pPr indent="0" marL="0">
+              <a:buNone/>
+            </a:pPr>
+            <a:r>
+              <a:rPr lang="en-US" sz="1000" b="1" dirty="0">
+                <a:solidFill>
+                  <a:srgbClr val="A8791F"/>
+                </a:solidFill>
+                <a:latin typeface="맑은 고딕" pitchFamily="34" charset="0"/>
+                <a:ea typeface="맑은 고딕" pitchFamily="34" charset="-122"/>
+                <a:cs typeface="맑은 고딕" pitchFamily="34" charset="-120"/>
+              </a:rPr>
+              <a:t> 배</a:t>
+            </a:r>
+            <a:endParaRPr lang="en-US" sz="2000" dirty="0"/>
+          </a:p>
+        </p:txBody>
+      </p:sp>
+      <p:sp>
+        <p:nvSpPr>
+          <p:cNvPr id="43" name="Text 40"/>
+          <p:cNvSpPr/>
+          <p:nvPr/>
+        </p:nvSpPr>
+        <p:spPr>
+          <a:xfrm>
+            <a:off x="10076688" y="4937760"/>
+            <a:ext cx="1554480" cy="182880"/>
+          </a:xfrm>
+          <a:prstGeom prst="rect">
+            <a:avLst/>
+          </a:prstGeom>
+          <a:noFill/>
+          <a:ln/>
+        </p:spPr>
+        <p:txBody>
+          <a:bodyPr wrap="square" lIns="0" tIns="0" rIns="0" bIns="0" rtlCol="0" anchor="ctr"/>
+          <a:lstStyle/>
+          <a:p>
+            <a:pPr indent="0" marL="0">
+              <a:buNone/>
+            </a:pPr>
+            <a:r>
+              <a:rPr lang="en-US" sz="700" dirty="0">
+                <a:solidFill>
+                  <a:srgbClr val="6C7873"/>
+                </a:solidFill>
+                <a:latin typeface="맑은 고딕" pitchFamily="34" charset="0"/>
+                <a:ea typeface="맑은 고딕" pitchFamily="34" charset="-122"/>
+                <a:cs typeface="맑은 고딕" pitchFamily="34" charset="-120"/>
+              </a:rPr>
               <a:t>러너러너 앱 화면</a:t>
             </a:r>
-            <a:endParaRPr lang="en-US" sz="740" dirty="0"/>
-          </a:p>
-        </p:txBody>
-      </p:sp>
-      <p:sp>
-        <p:nvSpPr>
-          <p:cNvPr id="42" name="Text 39"/>
-          <p:cNvSpPr/>
-          <p:nvPr/>
-        </p:nvSpPr>
-        <p:spPr>
-          <a:xfrm>
-            <a:off x="10488168" y="4974336"/>
-            <a:ext cx="1554480" cy="182880"/>
-          </a:xfrm>
-          <a:prstGeom prst="rect">
-            <a:avLst/>
-          </a:prstGeom>
-          <a:noFill/>
-          <a:ln/>
-        </p:spPr>
-        <p:txBody>
-          <a:bodyPr wrap="square" lIns="0" tIns="0" rIns="0" bIns="0" rtlCol="0" anchor="ctr"/>
-          <a:lstStyle/>
-          <a:p>
-            <a:pPr indent="0" marL="0">
-              <a:buNone/>
-            </a:pPr>
-            <a:r>
-              <a:rPr lang="en-US" sz="740" dirty="0">
-                <a:solidFill>
-                  <a:srgbClr val="6C7873"/>
-                </a:solidFill>
-                <a:latin typeface="맑은 고딕" pitchFamily="34" charset="0"/>
-                <a:ea typeface="맑은 고딕" pitchFamily="34" charset="-122"/>
-                <a:cs typeface="맑은 고딕" pitchFamily="34" charset="-120"/>
-              </a:rPr>
-              <a:t>리뉴얼 후 플랫폼 서비스 이용자</a:t>
-            </a:r>
-            <a:endParaRPr lang="en-US" sz="740" dirty="0"/>
-          </a:p>
-        </p:txBody>
-      </p:sp>
-      <p:sp>
-        <p:nvSpPr>
-          <p:cNvPr id="43" name="Text 40"/>
-          <p:cNvSpPr/>
-          <p:nvPr/>
-        </p:nvSpPr>
-        <p:spPr>
-          <a:xfrm>
-            <a:off x="10488168" y="5175504"/>
-            <a:ext cx="1463040" cy="292608"/>
-          </a:xfrm>
-          <a:prstGeom prst="rect">
-            <a:avLst/>
-          </a:prstGeom>
-          <a:noFill/>
-          <a:ln/>
-        </p:spPr>
-        <p:txBody>
-          <a:bodyPr wrap="square" lIns="0" tIns="0" rIns="0" bIns="0" rtlCol="0" anchor="ctr"/>
-          <a:lstStyle/>
-          <a:p>
-            <a:pPr indent="0" marL="0">
-              <a:buNone/>
-            </a:pPr>
-            <a:r>
-              <a:rPr lang="en-US" sz="1600" b="1" dirty="0">
-                <a:solidFill>
-                  <a:srgbClr val="14201C"/>
-                </a:solidFill>
-                <a:latin typeface="맑은 고딕" pitchFamily="34" charset="0"/>
-                <a:ea typeface="맑은 고딕" pitchFamily="34" charset="-122"/>
-                <a:cs typeface="맑은 고딕" pitchFamily="34" charset="-120"/>
-              </a:rPr>
-              <a:t>1.5</a:t>
-            </a:r>
-            <a:pPr indent="0" marL="0">
-              <a:buNone/>
-            </a:pPr>
-            <a:r>
-              <a:rPr lang="en-US" sz="900" b="1" dirty="0">
-                <a:solidFill>
-                  <a:srgbClr val="A8791F"/>
-                </a:solidFill>
-                <a:latin typeface="맑은 고딕" pitchFamily="34" charset="0"/>
-                <a:ea typeface="맑은 고딕" pitchFamily="34" charset="-122"/>
-                <a:cs typeface="맑은 고딕" pitchFamily="34" charset="-120"/>
-              </a:rPr>
-              <a:t> 배</a:t>
-            </a:r>
-            <a:endParaRPr lang="en-US" sz="1600" dirty="0"/>
+            <a:endParaRPr lang="en-US" sz="700" dirty="0"/>
           </a:p>
         </p:txBody>
       </p:sp>
@@ -22280,24 +22757,24 @@
         </p:nvSpPr>
         <p:spPr>
           <a:xfrm>
-            <a:off x="1847088" y="6144768"/>
-            <a:ext cx="9601200" cy="182880"/>
-          </a:xfrm>
-          <a:prstGeom prst="rect">
-            <a:avLst/>
-          </a:prstGeom>
-          <a:noFill/>
-          <a:ln/>
-        </p:spPr>
-        <p:txBody>
-          <a:bodyPr wrap="square" lIns="0" tIns="0" rIns="0" bIns="0" rtlCol="0" anchor="ctr"/>
-          <a:lstStyle/>
-          <a:p>
-            <a:pPr indent="0" marL="0">
-              <a:buNone/>
-            </a:pPr>
-            <a:r>
-              <a:rPr lang="en-US" sz="700" dirty="0">
+            <a:off x="1847088" y="6208776"/>
+            <a:ext cx="9601200" cy="164592"/>
+          </a:xfrm>
+          <a:prstGeom prst="rect">
+            <a:avLst/>
+          </a:prstGeom>
+          <a:noFill/>
+          <a:ln/>
+        </p:spPr>
+        <p:txBody>
+          <a:bodyPr wrap="square" lIns="0" tIns="0" rIns="0" bIns="0" rtlCol="0" anchor="ctr"/>
+          <a:lstStyle/>
+          <a:p>
+            <a:pPr indent="0" marL="0">
+              <a:buNone/>
+            </a:pPr>
+            <a:r>
+              <a:rPr lang="en-US" sz="680" dirty="0">
                 <a:solidFill>
                   <a:srgbClr val="6C7873"/>
                 </a:solidFill>
@@ -22307,7 +22784,7 @@
               </a:rPr>
               <a:t>※ 러너러너 앱 운영사는 (주)러너소프트로 러너스튜디오(주)와 별개 법인입니다. 이용자 1.5배 증가는 IT비즈뉴스 2024.7.4 보도 기준.</a:t>
             </a:r>
-            <a:endParaRPr lang="en-US" sz="700" dirty="0"/>
+            <a:endParaRPr lang="en-US" sz="680" dirty="0"/>
           </a:p>
         </p:txBody>
       </p:sp>
@@ -26332,24 +26809,24 @@
         </p:nvSpPr>
         <p:spPr>
           <a:xfrm>
-            <a:off x="1847088" y="6144768"/>
-            <a:ext cx="4572000" cy="182880"/>
-          </a:xfrm>
-          <a:prstGeom prst="rect">
-            <a:avLst/>
-          </a:prstGeom>
-          <a:noFill/>
-          <a:ln/>
-        </p:spPr>
-        <p:txBody>
-          <a:bodyPr wrap="square" lIns="0" tIns="0" rIns="0" bIns="0" rtlCol="0" anchor="ctr"/>
-          <a:lstStyle/>
-          <a:p>
-            <a:pPr indent="0" marL="0">
-              <a:buNone/>
-            </a:pPr>
-            <a:r>
-              <a:rPr lang="en-US" sz="700" dirty="0">
+            <a:off x="1847088" y="6208776"/>
+            <a:ext cx="4572000" cy="164592"/>
+          </a:xfrm>
+          <a:prstGeom prst="rect">
+            <a:avLst/>
+          </a:prstGeom>
+          <a:noFill/>
+          <a:ln/>
+        </p:spPr>
+        <p:txBody>
+          <a:bodyPr wrap="square" lIns="0" tIns="0" rIns="0" bIns="0" rtlCol="0" anchor="ctr"/>
+          <a:lstStyle/>
+          <a:p>
+            <a:pPr indent="0" marL="0">
+              <a:buNone/>
+            </a:pPr>
+            <a:r>
+              <a:rPr lang="en-US" sz="680" dirty="0">
                 <a:solidFill>
                   <a:srgbClr val="6C7873"/>
                 </a:solidFill>
@@ -26359,7 +26836,7 @@
               </a:rPr>
               <a:t>성공보수는 부가가치세 별도입니다.</a:t>
             </a:r>
-            <a:endParaRPr lang="en-US" sz="700" dirty="0"/>
+            <a:endParaRPr lang="en-US" sz="680" dirty="0"/>
           </a:p>
         </p:txBody>
       </p:sp>
